--- a/docs/plots/grant/jx_grant_linsubhr_diff_anyhosp.pptx
+++ b/docs/plots/grant/jx_grant_linsubhr_diff_anyhosp.pptx
@@ -2271,7 +2271,7 @@
           </p:nvSpPr>
           <p:spPr>
             <a:xfrm>
-              <a:off x="915645" y="5038294"/>
+              <a:off x="915645" y="5067975"/>
               <a:ext cx="7682587" cy="0"/>
             </a:xfrm>
             <a:custGeom>
@@ -2314,7 +2314,7 @@
           </p:nvSpPr>
           <p:spPr>
             <a:xfrm>
-              <a:off x="915645" y="4273666"/>
+              <a:off x="915645" y="4288924"/>
               <a:ext cx="7682587" cy="0"/>
             </a:xfrm>
             <a:custGeom>
@@ -2357,7 +2357,7 @@
           </p:nvSpPr>
           <p:spPr>
             <a:xfrm>
-              <a:off x="915645" y="3509037"/>
+              <a:off x="915645" y="3509873"/>
               <a:ext cx="7682587" cy="0"/>
             </a:xfrm>
             <a:custGeom>
@@ -2400,7 +2400,7 @@
           </p:nvSpPr>
           <p:spPr>
             <a:xfrm>
-              <a:off x="915645" y="2744409"/>
+              <a:off x="915645" y="2730822"/>
               <a:ext cx="7682587" cy="0"/>
             </a:xfrm>
             <a:custGeom>
@@ -2443,15 +2443,15 @@
           </p:nvSpPr>
           <p:spPr>
             <a:xfrm>
-              <a:off x="1701364" y="2209169"/>
-              <a:ext cx="0" cy="3364365"/>
+              <a:off x="1264853" y="2185486"/>
+              <a:ext cx="0" cy="3427824"/>
             </a:xfrm>
             <a:custGeom>
               <a:avLst/>
               <a:pathLst>
-                <a:path w="0" h="3364365">
+                <a:path w="0" h="3427824">
                   <a:moveTo>
-                    <a:pt x="0" y="3364365"/>
+                    <a:pt x="0" y="3427824"/>
                   </a:moveTo>
                   <a:lnTo>
                     <a:pt x="0" y="0"/>
@@ -2486,15 +2486,15 @@
           </p:nvSpPr>
           <p:spPr>
             <a:xfrm>
-              <a:off x="3447406" y="2209169"/>
-              <a:ext cx="0" cy="3364365"/>
+              <a:off x="2137874" y="2185486"/>
+              <a:ext cx="0" cy="3427824"/>
             </a:xfrm>
             <a:custGeom>
               <a:avLst/>
               <a:pathLst>
-                <a:path w="0" h="3364365">
+                <a:path w="0" h="3427824">
                   <a:moveTo>
-                    <a:pt x="0" y="3364365"/>
+                    <a:pt x="0" y="3427824"/>
                   </a:moveTo>
                   <a:lnTo>
                     <a:pt x="0" y="0"/>
@@ -2529,15 +2529,15 @@
           </p:nvSpPr>
           <p:spPr>
             <a:xfrm>
-              <a:off x="5193449" y="2209169"/>
-              <a:ext cx="0" cy="3364365"/>
+              <a:off x="3010896" y="2185486"/>
+              <a:ext cx="0" cy="3427824"/>
             </a:xfrm>
             <a:custGeom>
               <a:avLst/>
               <a:pathLst>
-                <a:path w="0" h="3364365">
+                <a:path w="0" h="3427824">
                   <a:moveTo>
-                    <a:pt x="0" y="3364365"/>
+                    <a:pt x="0" y="3427824"/>
                   </a:moveTo>
                   <a:lnTo>
                     <a:pt x="0" y="0"/>
@@ -2572,15 +2572,15 @@
           </p:nvSpPr>
           <p:spPr>
             <a:xfrm>
-              <a:off x="6939491" y="2209169"/>
-              <a:ext cx="0" cy="3364365"/>
+              <a:off x="3883917" y="2185486"/>
+              <a:ext cx="0" cy="3427824"/>
             </a:xfrm>
             <a:custGeom>
               <a:avLst/>
               <a:pathLst>
-                <a:path w="0" h="3364365">
+                <a:path w="0" h="3427824">
                   <a:moveTo>
-                    <a:pt x="0" y="3364365"/>
+                    <a:pt x="0" y="3427824"/>
                   </a:moveTo>
                   <a:lnTo>
                     <a:pt x="0" y="0"/>
@@ -2615,26 +2615,26 @@
           </p:nvSpPr>
           <p:spPr>
             <a:xfrm>
-              <a:off x="915645" y="5420609"/>
-              <a:ext cx="7682587" cy="0"/>
+              <a:off x="4756938" y="2185486"/>
+              <a:ext cx="0" cy="3427824"/>
             </a:xfrm>
             <a:custGeom>
               <a:avLst/>
               <a:pathLst>
-                <a:path w="7682587" h="0">
+                <a:path w="0" h="3427824">
                   <a:moveTo>
+                    <a:pt x="0" y="3427824"/>
+                  </a:moveTo>
+                  <a:lnTo>
                     <a:pt x="0" y="0"/>
-                  </a:moveTo>
-                  <a:lnTo>
-                    <a:pt x="7682587" y="0"/>
-                  </a:lnTo>
-                  <a:lnTo>
-                    <a:pt x="7682587" y="0"/>
+                  </a:lnTo>
+                  <a:lnTo>
+                    <a:pt x="0" y="0"/>
                   </a:lnTo>
                 </a:path>
               </a:pathLst>
             </a:custGeom>
-            <a:ln w="17246" cap="flat">
+            <a:ln w="8623" cap="flat">
               <a:solidFill>
                 <a:srgbClr val="EBEBEB">
                   <a:alpha val="100000"/>
@@ -2658,26 +2658,26 @@
           </p:nvSpPr>
           <p:spPr>
             <a:xfrm>
-              <a:off x="915645" y="4655980"/>
-              <a:ext cx="7682587" cy="0"/>
+              <a:off x="5629959" y="2185486"/>
+              <a:ext cx="0" cy="3427824"/>
             </a:xfrm>
             <a:custGeom>
               <a:avLst/>
               <a:pathLst>
-                <a:path w="7682587" h="0">
+                <a:path w="0" h="3427824">
                   <a:moveTo>
+                    <a:pt x="0" y="3427824"/>
+                  </a:moveTo>
+                  <a:lnTo>
                     <a:pt x="0" y="0"/>
-                  </a:moveTo>
-                  <a:lnTo>
-                    <a:pt x="7682587" y="0"/>
-                  </a:lnTo>
-                  <a:lnTo>
-                    <a:pt x="7682587" y="0"/>
+                  </a:lnTo>
+                  <a:lnTo>
+                    <a:pt x="0" y="0"/>
                   </a:lnTo>
                 </a:path>
               </a:pathLst>
             </a:custGeom>
-            <a:ln w="17246" cap="flat">
+            <a:ln w="8623" cap="flat">
               <a:solidFill>
                 <a:srgbClr val="EBEBEB">
                   <a:alpha val="100000"/>
@@ -2701,26 +2701,26 @@
           </p:nvSpPr>
           <p:spPr>
             <a:xfrm>
-              <a:off x="915645" y="3891352"/>
-              <a:ext cx="7682587" cy="0"/>
+              <a:off x="6502981" y="2185486"/>
+              <a:ext cx="0" cy="3427824"/>
             </a:xfrm>
             <a:custGeom>
               <a:avLst/>
               <a:pathLst>
-                <a:path w="7682587" h="0">
+                <a:path w="0" h="3427824">
                   <a:moveTo>
+                    <a:pt x="0" y="3427824"/>
+                  </a:moveTo>
+                  <a:lnTo>
                     <a:pt x="0" y="0"/>
-                  </a:moveTo>
-                  <a:lnTo>
-                    <a:pt x="7682587" y="0"/>
-                  </a:lnTo>
-                  <a:lnTo>
-                    <a:pt x="7682587" y="0"/>
+                  </a:lnTo>
+                  <a:lnTo>
+                    <a:pt x="0" y="0"/>
                   </a:lnTo>
                 </a:path>
               </a:pathLst>
             </a:custGeom>
-            <a:ln w="17246" cap="flat">
+            <a:ln w="8623" cap="flat">
               <a:solidFill>
                 <a:srgbClr val="EBEBEB">
                   <a:alpha val="100000"/>
@@ -2744,26 +2744,26 @@
           </p:nvSpPr>
           <p:spPr>
             <a:xfrm>
-              <a:off x="915645" y="3126723"/>
-              <a:ext cx="7682587" cy="0"/>
+              <a:off x="7376002" y="2185486"/>
+              <a:ext cx="0" cy="3427824"/>
             </a:xfrm>
             <a:custGeom>
               <a:avLst/>
               <a:pathLst>
-                <a:path w="7682587" h="0">
+                <a:path w="0" h="3427824">
                   <a:moveTo>
+                    <a:pt x="0" y="3427824"/>
+                  </a:moveTo>
+                  <a:lnTo>
                     <a:pt x="0" y="0"/>
-                  </a:moveTo>
-                  <a:lnTo>
-                    <a:pt x="7682587" y="0"/>
-                  </a:lnTo>
-                  <a:lnTo>
-                    <a:pt x="7682587" y="0"/>
+                  </a:lnTo>
+                  <a:lnTo>
+                    <a:pt x="0" y="0"/>
                   </a:lnTo>
                 </a:path>
               </a:pathLst>
             </a:custGeom>
-            <a:ln w="17246" cap="flat">
+            <a:ln w="8623" cap="flat">
               <a:solidFill>
                 <a:srgbClr val="EBEBEB">
                   <a:alpha val="100000"/>
@@ -2787,26 +2787,26 @@
           </p:nvSpPr>
           <p:spPr>
             <a:xfrm>
-              <a:off x="915645" y="2362095"/>
-              <a:ext cx="7682587" cy="0"/>
+              <a:off x="8249023" y="2185486"/>
+              <a:ext cx="0" cy="3427824"/>
             </a:xfrm>
             <a:custGeom>
               <a:avLst/>
               <a:pathLst>
-                <a:path w="7682587" h="0">
+                <a:path w="0" h="3427824">
                   <a:moveTo>
+                    <a:pt x="0" y="3427824"/>
+                  </a:moveTo>
+                  <a:lnTo>
                     <a:pt x="0" y="0"/>
-                  </a:moveTo>
-                  <a:lnTo>
-                    <a:pt x="7682587" y="0"/>
-                  </a:lnTo>
-                  <a:lnTo>
-                    <a:pt x="7682587" y="0"/>
+                  </a:lnTo>
+                  <a:lnTo>
+                    <a:pt x="0" y="0"/>
                   </a:lnTo>
                 </a:path>
               </a:pathLst>
             </a:custGeom>
-            <a:ln w="17246" cap="flat">
+            <a:ln w="8623" cap="flat">
               <a:solidFill>
                 <a:srgbClr val="EBEBEB">
                   <a:alpha val="100000"/>
@@ -2830,21 +2830,21 @@
           </p:nvSpPr>
           <p:spPr>
             <a:xfrm>
-              <a:off x="2574385" y="2209169"/>
-              <a:ext cx="0" cy="3364365"/>
+              <a:off x="915645" y="5457500"/>
+              <a:ext cx="7682587" cy="0"/>
             </a:xfrm>
             <a:custGeom>
               <a:avLst/>
               <a:pathLst>
-                <a:path w="0" h="3364365">
+                <a:path w="7682587" h="0">
                   <a:moveTo>
-                    <a:pt x="0" y="3364365"/>
+                    <a:pt x="0" y="0"/>
                   </a:moveTo>
                   <a:lnTo>
-                    <a:pt x="0" y="0"/>
-                  </a:lnTo>
-                  <a:lnTo>
-                    <a:pt x="0" y="0"/>
+                    <a:pt x="7682587" y="0"/>
+                  </a:lnTo>
+                  <a:lnTo>
+                    <a:pt x="7682587" y="0"/>
                   </a:lnTo>
                 </a:path>
               </a:pathLst>
@@ -2873,21 +2873,21 @@
           </p:nvSpPr>
           <p:spPr>
             <a:xfrm>
-              <a:off x="4320427" y="2209169"/>
-              <a:ext cx="0" cy="3364365"/>
+              <a:off x="915645" y="4678449"/>
+              <a:ext cx="7682587" cy="0"/>
             </a:xfrm>
             <a:custGeom>
               <a:avLst/>
               <a:pathLst>
-                <a:path w="0" h="3364365">
+                <a:path w="7682587" h="0">
                   <a:moveTo>
-                    <a:pt x="0" y="3364365"/>
+                    <a:pt x="0" y="0"/>
                   </a:moveTo>
                   <a:lnTo>
-                    <a:pt x="0" y="0"/>
-                  </a:lnTo>
-                  <a:lnTo>
-                    <a:pt x="0" y="0"/>
+                    <a:pt x="7682587" y="0"/>
+                  </a:lnTo>
+                  <a:lnTo>
+                    <a:pt x="7682587" y="0"/>
                   </a:lnTo>
                 </a:path>
               </a:pathLst>
@@ -2916,21 +2916,21 @@
           </p:nvSpPr>
           <p:spPr>
             <a:xfrm>
-              <a:off x="6066470" y="2209169"/>
-              <a:ext cx="0" cy="3364365"/>
+              <a:off x="915645" y="3899398"/>
+              <a:ext cx="7682587" cy="0"/>
             </a:xfrm>
             <a:custGeom>
               <a:avLst/>
               <a:pathLst>
-                <a:path w="0" h="3364365">
+                <a:path w="7682587" h="0">
                   <a:moveTo>
-                    <a:pt x="0" y="3364365"/>
+                    <a:pt x="0" y="0"/>
                   </a:moveTo>
                   <a:lnTo>
-                    <a:pt x="0" y="0"/>
-                  </a:lnTo>
-                  <a:lnTo>
-                    <a:pt x="0" y="0"/>
+                    <a:pt x="7682587" y="0"/>
+                  </a:lnTo>
+                  <a:lnTo>
+                    <a:pt x="7682587" y="0"/>
                   </a:lnTo>
                 </a:path>
               </a:pathLst>
@@ -2959,21 +2959,21 @@
           </p:nvSpPr>
           <p:spPr>
             <a:xfrm>
-              <a:off x="7812512" y="2209169"/>
-              <a:ext cx="0" cy="3364365"/>
+              <a:off x="915645" y="3120347"/>
+              <a:ext cx="7682587" cy="0"/>
             </a:xfrm>
             <a:custGeom>
               <a:avLst/>
               <a:pathLst>
-                <a:path w="0" h="3364365">
+                <a:path w="7682587" h="0">
                   <a:moveTo>
-                    <a:pt x="0" y="3364365"/>
+                    <a:pt x="0" y="0"/>
                   </a:moveTo>
                   <a:lnTo>
-                    <a:pt x="0" y="0"/>
-                  </a:lnTo>
-                  <a:lnTo>
-                    <a:pt x="0" y="0"/>
+                    <a:pt x="7682587" y="0"/>
+                  </a:lnTo>
+                  <a:lnTo>
+                    <a:pt x="7682587" y="0"/>
                   </a:lnTo>
                 </a:path>
               </a:pathLst>
@@ -2996,543 +2996,930 @@
         </p:sp>
         <p:sp>
           <p:nvSpPr>
-            <p:cNvPr id="21" name="pg21"/>
+            <p:cNvPr id="21" name="pl21"/>
             <p:cNvSpPr/>
             <p:nvPr/>
           </p:nvSpPr>
           <p:spPr>
             <a:xfrm>
-              <a:off x="915645" y="2209169"/>
-              <a:ext cx="7260303" cy="3163876"/>
+              <a:off x="915645" y="2341296"/>
+              <a:ext cx="7682587" cy="0"/>
             </a:xfrm>
             <a:custGeom>
               <a:avLst/>
               <a:pathLst>
-                <a:path w="7260303" h="3163876">
+                <a:path w="7682587" h="0">
+                  <a:moveTo>
+                    <a:pt x="0" y="0"/>
+                  </a:moveTo>
+                  <a:lnTo>
+                    <a:pt x="7682587" y="0"/>
+                  </a:lnTo>
+                  <a:lnTo>
+                    <a:pt x="7682587" y="0"/>
+                  </a:lnTo>
+                </a:path>
+              </a:pathLst>
+            </a:custGeom>
+            <a:ln w="17246" cap="flat">
+              <a:solidFill>
+                <a:srgbClr val="EBEBEB">
+                  <a:alpha val="100000"/>
+                </a:srgbClr>
+              </a:solidFill>
+              <a:prstDash val="solid"/>
+              <a:round/>
+            </a:ln>
+          </p:spPr>
+          <p:txBody>
+            <a:bodyPr/>
+            <a:lstStyle/>
+            <a:p/>
+          </p:txBody>
+        </p:sp>
+        <p:sp>
+          <p:nvSpPr>
+            <p:cNvPr id="22" name="pl22"/>
+            <p:cNvSpPr/>
+            <p:nvPr/>
+          </p:nvSpPr>
+          <p:spPr>
+            <a:xfrm>
+              <a:off x="1701364" y="2185486"/>
+              <a:ext cx="0" cy="3427824"/>
+            </a:xfrm>
+            <a:custGeom>
+              <a:avLst/>
+              <a:pathLst>
+                <a:path w="0" h="3427824">
+                  <a:moveTo>
+                    <a:pt x="0" y="3427824"/>
+                  </a:moveTo>
+                  <a:lnTo>
+                    <a:pt x="0" y="0"/>
+                  </a:lnTo>
+                  <a:lnTo>
+                    <a:pt x="0" y="0"/>
+                  </a:lnTo>
+                </a:path>
+              </a:pathLst>
+            </a:custGeom>
+            <a:ln w="17246" cap="flat">
+              <a:solidFill>
+                <a:srgbClr val="EBEBEB">
+                  <a:alpha val="100000"/>
+                </a:srgbClr>
+              </a:solidFill>
+              <a:prstDash val="solid"/>
+              <a:round/>
+            </a:ln>
+          </p:spPr>
+          <p:txBody>
+            <a:bodyPr/>
+            <a:lstStyle/>
+            <a:p/>
+          </p:txBody>
+        </p:sp>
+        <p:sp>
+          <p:nvSpPr>
+            <p:cNvPr id="23" name="pl23"/>
+            <p:cNvSpPr/>
+            <p:nvPr/>
+          </p:nvSpPr>
+          <p:spPr>
+            <a:xfrm>
+              <a:off x="2574385" y="2185486"/>
+              <a:ext cx="0" cy="3427824"/>
+            </a:xfrm>
+            <a:custGeom>
+              <a:avLst/>
+              <a:pathLst>
+                <a:path w="0" h="3427824">
+                  <a:moveTo>
+                    <a:pt x="0" y="3427824"/>
+                  </a:moveTo>
+                  <a:lnTo>
+                    <a:pt x="0" y="0"/>
+                  </a:lnTo>
+                  <a:lnTo>
+                    <a:pt x="0" y="0"/>
+                  </a:lnTo>
+                </a:path>
+              </a:pathLst>
+            </a:custGeom>
+            <a:ln w="17246" cap="flat">
+              <a:solidFill>
+                <a:srgbClr val="EBEBEB">
+                  <a:alpha val="100000"/>
+                </a:srgbClr>
+              </a:solidFill>
+              <a:prstDash val="solid"/>
+              <a:round/>
+            </a:ln>
+          </p:spPr>
+          <p:txBody>
+            <a:bodyPr/>
+            <a:lstStyle/>
+            <a:p/>
+          </p:txBody>
+        </p:sp>
+        <p:sp>
+          <p:nvSpPr>
+            <p:cNvPr id="24" name="pl24"/>
+            <p:cNvSpPr/>
+            <p:nvPr/>
+          </p:nvSpPr>
+          <p:spPr>
+            <a:xfrm>
+              <a:off x="3447406" y="2185486"/>
+              <a:ext cx="0" cy="3427824"/>
+            </a:xfrm>
+            <a:custGeom>
+              <a:avLst/>
+              <a:pathLst>
+                <a:path w="0" h="3427824">
+                  <a:moveTo>
+                    <a:pt x="0" y="3427824"/>
+                  </a:moveTo>
+                  <a:lnTo>
+                    <a:pt x="0" y="0"/>
+                  </a:lnTo>
+                  <a:lnTo>
+                    <a:pt x="0" y="0"/>
+                  </a:lnTo>
+                </a:path>
+              </a:pathLst>
+            </a:custGeom>
+            <a:ln w="17246" cap="flat">
+              <a:solidFill>
+                <a:srgbClr val="EBEBEB">
+                  <a:alpha val="100000"/>
+                </a:srgbClr>
+              </a:solidFill>
+              <a:prstDash val="solid"/>
+              <a:round/>
+            </a:ln>
+          </p:spPr>
+          <p:txBody>
+            <a:bodyPr/>
+            <a:lstStyle/>
+            <a:p/>
+          </p:txBody>
+        </p:sp>
+        <p:sp>
+          <p:nvSpPr>
+            <p:cNvPr id="25" name="pl25"/>
+            <p:cNvSpPr/>
+            <p:nvPr/>
+          </p:nvSpPr>
+          <p:spPr>
+            <a:xfrm>
+              <a:off x="4320427" y="2185486"/>
+              <a:ext cx="0" cy="3427824"/>
+            </a:xfrm>
+            <a:custGeom>
+              <a:avLst/>
+              <a:pathLst>
+                <a:path w="0" h="3427824">
+                  <a:moveTo>
+                    <a:pt x="0" y="3427824"/>
+                  </a:moveTo>
+                  <a:lnTo>
+                    <a:pt x="0" y="0"/>
+                  </a:lnTo>
+                  <a:lnTo>
+                    <a:pt x="0" y="0"/>
+                  </a:lnTo>
+                </a:path>
+              </a:pathLst>
+            </a:custGeom>
+            <a:ln w="17246" cap="flat">
+              <a:solidFill>
+                <a:srgbClr val="EBEBEB">
+                  <a:alpha val="100000"/>
+                </a:srgbClr>
+              </a:solidFill>
+              <a:prstDash val="solid"/>
+              <a:round/>
+            </a:ln>
+          </p:spPr>
+          <p:txBody>
+            <a:bodyPr/>
+            <a:lstStyle/>
+            <a:p/>
+          </p:txBody>
+        </p:sp>
+        <p:sp>
+          <p:nvSpPr>
+            <p:cNvPr id="26" name="pl26"/>
+            <p:cNvSpPr/>
+            <p:nvPr/>
+          </p:nvSpPr>
+          <p:spPr>
+            <a:xfrm>
+              <a:off x="5193449" y="2185486"/>
+              <a:ext cx="0" cy="3427824"/>
+            </a:xfrm>
+            <a:custGeom>
+              <a:avLst/>
+              <a:pathLst>
+                <a:path w="0" h="3427824">
+                  <a:moveTo>
+                    <a:pt x="0" y="3427824"/>
+                  </a:moveTo>
+                  <a:lnTo>
+                    <a:pt x="0" y="0"/>
+                  </a:lnTo>
+                  <a:lnTo>
+                    <a:pt x="0" y="0"/>
+                  </a:lnTo>
+                </a:path>
+              </a:pathLst>
+            </a:custGeom>
+            <a:ln w="17246" cap="flat">
+              <a:solidFill>
+                <a:srgbClr val="EBEBEB">
+                  <a:alpha val="100000"/>
+                </a:srgbClr>
+              </a:solidFill>
+              <a:prstDash val="solid"/>
+              <a:round/>
+            </a:ln>
+          </p:spPr>
+          <p:txBody>
+            <a:bodyPr/>
+            <a:lstStyle/>
+            <a:p/>
+          </p:txBody>
+        </p:sp>
+        <p:sp>
+          <p:nvSpPr>
+            <p:cNvPr id="27" name="pl27"/>
+            <p:cNvSpPr/>
+            <p:nvPr/>
+          </p:nvSpPr>
+          <p:spPr>
+            <a:xfrm>
+              <a:off x="6066470" y="2185486"/>
+              <a:ext cx="0" cy="3427824"/>
+            </a:xfrm>
+            <a:custGeom>
+              <a:avLst/>
+              <a:pathLst>
+                <a:path w="0" h="3427824">
+                  <a:moveTo>
+                    <a:pt x="0" y="3427824"/>
+                  </a:moveTo>
+                  <a:lnTo>
+                    <a:pt x="0" y="0"/>
+                  </a:lnTo>
+                  <a:lnTo>
+                    <a:pt x="0" y="0"/>
+                  </a:lnTo>
+                </a:path>
+              </a:pathLst>
+            </a:custGeom>
+            <a:ln w="17246" cap="flat">
+              <a:solidFill>
+                <a:srgbClr val="EBEBEB">
+                  <a:alpha val="100000"/>
+                </a:srgbClr>
+              </a:solidFill>
+              <a:prstDash val="solid"/>
+              <a:round/>
+            </a:ln>
+          </p:spPr>
+          <p:txBody>
+            <a:bodyPr/>
+            <a:lstStyle/>
+            <a:p/>
+          </p:txBody>
+        </p:sp>
+        <p:sp>
+          <p:nvSpPr>
+            <p:cNvPr id="28" name="pl28"/>
+            <p:cNvSpPr/>
+            <p:nvPr/>
+          </p:nvSpPr>
+          <p:spPr>
+            <a:xfrm>
+              <a:off x="6939491" y="2185486"/>
+              <a:ext cx="0" cy="3427824"/>
+            </a:xfrm>
+            <a:custGeom>
+              <a:avLst/>
+              <a:pathLst>
+                <a:path w="0" h="3427824">
+                  <a:moveTo>
+                    <a:pt x="0" y="3427824"/>
+                  </a:moveTo>
+                  <a:lnTo>
+                    <a:pt x="0" y="0"/>
+                  </a:lnTo>
+                  <a:lnTo>
+                    <a:pt x="0" y="0"/>
+                  </a:lnTo>
+                </a:path>
+              </a:pathLst>
+            </a:custGeom>
+            <a:ln w="17246" cap="flat">
+              <a:solidFill>
+                <a:srgbClr val="EBEBEB">
+                  <a:alpha val="100000"/>
+                </a:srgbClr>
+              </a:solidFill>
+              <a:prstDash val="solid"/>
+              <a:round/>
+            </a:ln>
+          </p:spPr>
+          <p:txBody>
+            <a:bodyPr/>
+            <a:lstStyle/>
+            <a:p/>
+          </p:txBody>
+        </p:sp>
+        <p:sp>
+          <p:nvSpPr>
+            <p:cNvPr id="29" name="pl29"/>
+            <p:cNvSpPr/>
+            <p:nvPr/>
+          </p:nvSpPr>
+          <p:spPr>
+            <a:xfrm>
+              <a:off x="7812512" y="2185486"/>
+              <a:ext cx="0" cy="3427824"/>
+            </a:xfrm>
+            <a:custGeom>
+              <a:avLst/>
+              <a:pathLst>
+                <a:path w="0" h="3427824">
+                  <a:moveTo>
+                    <a:pt x="0" y="3427824"/>
+                  </a:moveTo>
+                  <a:lnTo>
+                    <a:pt x="0" y="0"/>
+                  </a:lnTo>
+                  <a:lnTo>
+                    <a:pt x="0" y="0"/>
+                  </a:lnTo>
+                </a:path>
+              </a:pathLst>
+            </a:custGeom>
+            <a:ln w="17246" cap="flat">
+              <a:solidFill>
+                <a:srgbClr val="EBEBEB">
+                  <a:alpha val="100000"/>
+                </a:srgbClr>
+              </a:solidFill>
+              <a:prstDash val="solid"/>
+              <a:round/>
+            </a:ln>
+          </p:spPr>
+          <p:txBody>
+            <a:bodyPr/>
+            <a:lstStyle/>
+            <a:p/>
+          </p:txBody>
+        </p:sp>
+        <p:sp>
+          <p:nvSpPr>
+            <p:cNvPr id="30" name="pg30"/>
+            <p:cNvSpPr/>
+            <p:nvPr/>
+          </p:nvSpPr>
+          <p:spPr>
+            <a:xfrm>
+              <a:off x="915645" y="2185486"/>
+              <a:ext cx="7260303" cy="3223554"/>
+            </a:xfrm>
+            <a:custGeom>
+              <a:avLst/>
+              <a:pathLst>
+                <a:path w="7260303" h="3223554">
                   <a:moveTo>
                     <a:pt x="1307491" y="0"/>
                   </a:moveTo>
                   <a:lnTo>
-                    <a:pt x="1372234" y="144379"/>
-                  </a:lnTo>
-                  <a:lnTo>
-                    <a:pt x="1448702" y="305926"/>
-                  </a:lnTo>
-                  <a:lnTo>
-                    <a:pt x="1525171" y="458964"/>
-                  </a:lnTo>
-                  <a:lnTo>
-                    <a:pt x="1601639" y="603941"/>
-                  </a:lnTo>
-                  <a:lnTo>
-                    <a:pt x="1678107" y="741282"/>
-                  </a:lnTo>
-                  <a:lnTo>
-                    <a:pt x="1754576" y="871389"/>
-                  </a:lnTo>
-                  <a:lnTo>
-                    <a:pt x="1831044" y="994643"/>
-                  </a:lnTo>
-                  <a:lnTo>
-                    <a:pt x="1907513" y="1111405"/>
-                  </a:lnTo>
-                  <a:lnTo>
-                    <a:pt x="1983981" y="1222017"/>
-                  </a:lnTo>
-                  <a:lnTo>
-                    <a:pt x="2060450" y="1326803"/>
-                  </a:lnTo>
-                  <a:lnTo>
-                    <a:pt x="2136918" y="1426070"/>
-                  </a:lnTo>
-                  <a:lnTo>
-                    <a:pt x="2213386" y="1520108"/>
-                  </a:lnTo>
-                  <a:lnTo>
-                    <a:pt x="2289855" y="1609193"/>
-                  </a:lnTo>
-                  <a:lnTo>
-                    <a:pt x="2366323" y="1693586"/>
-                  </a:lnTo>
-                  <a:lnTo>
-                    <a:pt x="2442792" y="1773533"/>
-                  </a:lnTo>
-                  <a:lnTo>
-                    <a:pt x="2519260" y="1849270"/>
-                  </a:lnTo>
-                  <a:lnTo>
-                    <a:pt x="2595729" y="1921018"/>
-                  </a:lnTo>
-                  <a:lnTo>
-                    <a:pt x="2672197" y="1988986"/>
-                  </a:lnTo>
-                  <a:lnTo>
-                    <a:pt x="2748666" y="2053375"/>
-                  </a:lnTo>
-                  <a:lnTo>
-                    <a:pt x="2825134" y="2114372"/>
-                  </a:lnTo>
-                  <a:lnTo>
-                    <a:pt x="2901602" y="2172156"/>
-                  </a:lnTo>
-                  <a:lnTo>
-                    <a:pt x="2978071" y="2226896"/>
-                  </a:lnTo>
-                  <a:lnTo>
-                    <a:pt x="3054539" y="2278754"/>
-                  </a:lnTo>
-                  <a:lnTo>
-                    <a:pt x="3131008" y="2327880"/>
-                  </a:lnTo>
-                  <a:lnTo>
-                    <a:pt x="3207476" y="2374418"/>
-                  </a:lnTo>
-                  <a:lnTo>
-                    <a:pt x="3283945" y="2418505"/>
-                  </a:lnTo>
-                  <a:lnTo>
-                    <a:pt x="3360413" y="2450345"/>
-                  </a:lnTo>
-                  <a:lnTo>
-                    <a:pt x="3436881" y="2461014"/>
-                  </a:lnTo>
-                  <a:lnTo>
-                    <a:pt x="3513350" y="2471533"/>
-                  </a:lnTo>
-                  <a:lnTo>
-                    <a:pt x="3589818" y="2481904"/>
-                  </a:lnTo>
-                  <a:lnTo>
-                    <a:pt x="3666287" y="2492131"/>
-                  </a:lnTo>
-                  <a:lnTo>
-                    <a:pt x="3742755" y="2502213"/>
-                  </a:lnTo>
-                  <a:lnTo>
-                    <a:pt x="3819224" y="2512155"/>
-                  </a:lnTo>
-                  <a:lnTo>
-                    <a:pt x="3895692" y="2521957"/>
-                  </a:lnTo>
-                  <a:lnTo>
-                    <a:pt x="3972160" y="2531622"/>
-                  </a:lnTo>
-                  <a:lnTo>
-                    <a:pt x="4048629" y="2541151"/>
-                  </a:lnTo>
-                  <a:lnTo>
-                    <a:pt x="4125097" y="2550547"/>
-                  </a:lnTo>
-                  <a:lnTo>
-                    <a:pt x="4201566" y="2559811"/>
-                  </a:lnTo>
-                  <a:lnTo>
-                    <a:pt x="4278034" y="2568945"/>
-                  </a:lnTo>
-                  <a:lnTo>
-                    <a:pt x="4354503" y="2577951"/>
-                  </a:lnTo>
-                  <a:lnTo>
-                    <a:pt x="4430971" y="2586831"/>
-                  </a:lnTo>
-                  <a:lnTo>
-                    <a:pt x="4507439" y="2595586"/>
-                  </a:lnTo>
-                  <a:lnTo>
-                    <a:pt x="4583908" y="2604219"/>
-                  </a:lnTo>
-                  <a:lnTo>
-                    <a:pt x="4660376" y="2612730"/>
-                  </a:lnTo>
-                  <a:lnTo>
-                    <a:pt x="4736845" y="2621123"/>
-                  </a:lnTo>
-                  <a:lnTo>
-                    <a:pt x="4813313" y="2629397"/>
-                  </a:lnTo>
-                  <a:lnTo>
-                    <a:pt x="4889782" y="2637556"/>
-                  </a:lnTo>
-                  <a:lnTo>
-                    <a:pt x="4966250" y="2645601"/>
-                  </a:lnTo>
-                  <a:lnTo>
-                    <a:pt x="5042719" y="2653532"/>
-                  </a:lnTo>
-                  <a:lnTo>
-                    <a:pt x="5119187" y="2661352"/>
-                  </a:lnTo>
-                  <a:lnTo>
-                    <a:pt x="5195655" y="2669063"/>
-                  </a:lnTo>
-                  <a:lnTo>
-                    <a:pt x="5272124" y="2676666"/>
-                  </a:lnTo>
-                  <a:lnTo>
-                    <a:pt x="5348592" y="2684162"/>
-                  </a:lnTo>
-                  <a:lnTo>
-                    <a:pt x="5425061" y="2691553"/>
-                  </a:lnTo>
-                  <a:lnTo>
-                    <a:pt x="5501529" y="2698841"/>
-                  </a:lnTo>
-                  <a:lnTo>
-                    <a:pt x="5577998" y="2706026"/>
-                  </a:lnTo>
-                  <a:lnTo>
-                    <a:pt x="5654466" y="2713110"/>
-                  </a:lnTo>
-                  <a:lnTo>
-                    <a:pt x="5730934" y="2720096"/>
-                  </a:lnTo>
-                  <a:lnTo>
-                    <a:pt x="5807403" y="2726983"/>
-                  </a:lnTo>
-                  <a:lnTo>
-                    <a:pt x="5883871" y="2733774"/>
-                  </a:lnTo>
-                  <a:lnTo>
-                    <a:pt x="5960340" y="2740469"/>
-                  </a:lnTo>
-                  <a:lnTo>
-                    <a:pt x="6036808" y="2747071"/>
-                  </a:lnTo>
-                  <a:lnTo>
-                    <a:pt x="6113277" y="2753580"/>
-                  </a:lnTo>
-                  <a:lnTo>
-                    <a:pt x="6189745" y="2759998"/>
-                  </a:lnTo>
-                  <a:lnTo>
-                    <a:pt x="6266213" y="2766326"/>
-                  </a:lnTo>
-                  <a:lnTo>
-                    <a:pt x="6342682" y="2772566"/>
-                  </a:lnTo>
-                  <a:lnTo>
-                    <a:pt x="6419150" y="2778718"/>
-                  </a:lnTo>
-                  <a:lnTo>
-                    <a:pt x="6495619" y="2784783"/>
-                  </a:lnTo>
-                  <a:lnTo>
-                    <a:pt x="6572087" y="2790764"/>
-                  </a:lnTo>
-                  <a:lnTo>
-                    <a:pt x="6648556" y="2796661"/>
-                  </a:lnTo>
-                  <a:lnTo>
-                    <a:pt x="6725024" y="2802475"/>
-                  </a:lnTo>
-                  <a:lnTo>
-                    <a:pt x="6801492" y="2808207"/>
-                  </a:lnTo>
-                  <a:lnTo>
-                    <a:pt x="6877961" y="2813860"/>
-                  </a:lnTo>
-                  <a:lnTo>
-                    <a:pt x="6954429" y="2819433"/>
-                  </a:lnTo>
-                  <a:lnTo>
-                    <a:pt x="7030898" y="2824928"/>
-                  </a:lnTo>
-                  <a:lnTo>
-                    <a:pt x="7107366" y="2830345"/>
-                  </a:lnTo>
-                  <a:lnTo>
-                    <a:pt x="7183835" y="2835687"/>
-                  </a:lnTo>
-                  <a:lnTo>
-                    <a:pt x="7260303" y="2840954"/>
-                  </a:lnTo>
-                  <a:lnTo>
-                    <a:pt x="7260303" y="3163876"/>
-                  </a:lnTo>
-                  <a:lnTo>
-                    <a:pt x="7183835" y="3161232"/>
-                  </a:lnTo>
-                  <a:lnTo>
-                    <a:pt x="7107366" y="3158440"/>
-                  </a:lnTo>
-                  <a:lnTo>
-                    <a:pt x="7030898" y="3155494"/>
-                  </a:lnTo>
-                  <a:lnTo>
-                    <a:pt x="6954429" y="3152383"/>
-                  </a:lnTo>
-                  <a:lnTo>
-                    <a:pt x="6877961" y="3149100"/>
-                  </a:lnTo>
-                  <a:lnTo>
-                    <a:pt x="6801492" y="3145633"/>
-                  </a:lnTo>
-                  <a:lnTo>
-                    <a:pt x="6725024" y="3141975"/>
-                  </a:lnTo>
-                  <a:lnTo>
-                    <a:pt x="6648556" y="3138112"/>
-                  </a:lnTo>
-                  <a:lnTo>
-                    <a:pt x="6572087" y="3134035"/>
-                  </a:lnTo>
-                  <a:lnTo>
-                    <a:pt x="6495619" y="3129732"/>
-                  </a:lnTo>
-                  <a:lnTo>
-                    <a:pt x="6419150" y="3125189"/>
-                  </a:lnTo>
-                  <a:lnTo>
-                    <a:pt x="6342682" y="3120393"/>
-                  </a:lnTo>
-                  <a:lnTo>
-                    <a:pt x="6266213" y="3115331"/>
-                  </a:lnTo>
-                  <a:lnTo>
-                    <a:pt x="6189745" y="3109988"/>
-                  </a:lnTo>
-                  <a:lnTo>
-                    <a:pt x="6113277" y="3104347"/>
-                  </a:lnTo>
-                  <a:lnTo>
-                    <a:pt x="6036808" y="3098392"/>
-                  </a:lnTo>
-                  <a:lnTo>
-                    <a:pt x="5960340" y="3092107"/>
-                  </a:lnTo>
-                  <a:lnTo>
-                    <a:pt x="5883871" y="3085472"/>
-                  </a:lnTo>
-                  <a:lnTo>
-                    <a:pt x="5807403" y="3078468"/>
-                  </a:lnTo>
-                  <a:lnTo>
-                    <a:pt x="5730934" y="3071075"/>
-                  </a:lnTo>
-                  <a:lnTo>
-                    <a:pt x="5654466" y="3063271"/>
-                  </a:lnTo>
-                  <a:lnTo>
-                    <a:pt x="5577998" y="3055033"/>
-                  </a:lnTo>
-                  <a:lnTo>
-                    <a:pt x="5501529" y="3046337"/>
-                  </a:lnTo>
-                  <a:lnTo>
-                    <a:pt x="5425061" y="3037157"/>
-                  </a:lnTo>
-                  <a:lnTo>
-                    <a:pt x="5348592" y="3027467"/>
-                  </a:lnTo>
-                  <a:lnTo>
-                    <a:pt x="5272124" y="3017238"/>
-                  </a:lnTo>
-                  <a:lnTo>
-                    <a:pt x="5195655" y="3006440"/>
-                  </a:lnTo>
-                  <a:lnTo>
-                    <a:pt x="5119187" y="2995042"/>
-                  </a:lnTo>
-                  <a:lnTo>
-                    <a:pt x="5042719" y="2983011"/>
-                  </a:lnTo>
-                  <a:lnTo>
-                    <a:pt x="4966250" y="2970310"/>
-                  </a:lnTo>
-                  <a:lnTo>
-                    <a:pt x="4889782" y="2956903"/>
-                  </a:lnTo>
-                  <a:lnTo>
-                    <a:pt x="4813313" y="2942751"/>
-                  </a:lnTo>
-                  <a:lnTo>
-                    <a:pt x="4736845" y="2927812"/>
-                  </a:lnTo>
-                  <a:lnTo>
-                    <a:pt x="4660376" y="2912042"/>
-                  </a:lnTo>
-                  <a:lnTo>
-                    <a:pt x="4583908" y="2895396"/>
-                  </a:lnTo>
-                  <a:lnTo>
-                    <a:pt x="4507439" y="2877824"/>
-                  </a:lnTo>
-                  <a:lnTo>
-                    <a:pt x="4430971" y="2859275"/>
-                  </a:lnTo>
-                  <a:lnTo>
-                    <a:pt x="4354503" y="2839694"/>
-                  </a:lnTo>
-                  <a:lnTo>
-                    <a:pt x="4278034" y="2819025"/>
-                  </a:lnTo>
-                  <a:lnTo>
-                    <a:pt x="4201566" y="2797207"/>
-                  </a:lnTo>
-                  <a:lnTo>
-                    <a:pt x="4125097" y="2774176"/>
-                  </a:lnTo>
-                  <a:lnTo>
-                    <a:pt x="4048629" y="2749864"/>
-                  </a:lnTo>
-                  <a:lnTo>
-                    <a:pt x="3972160" y="2724200"/>
-                  </a:lnTo>
-                  <a:lnTo>
-                    <a:pt x="3895692" y="2697110"/>
-                  </a:lnTo>
-                  <a:lnTo>
-                    <a:pt x="3819224" y="2668513"/>
-                  </a:lnTo>
-                  <a:lnTo>
-                    <a:pt x="3742755" y="2638326"/>
-                  </a:lnTo>
-                  <a:lnTo>
-                    <a:pt x="3666287" y="2606461"/>
-                  </a:lnTo>
-                  <a:lnTo>
-                    <a:pt x="3589818" y="2572824"/>
-                  </a:lnTo>
-                  <a:lnTo>
-                    <a:pt x="3513350" y="2537317"/>
-                  </a:lnTo>
-                  <a:lnTo>
-                    <a:pt x="3436881" y="2499836"/>
-                  </a:lnTo>
-                  <a:lnTo>
-                    <a:pt x="3360413" y="2460270"/>
-                  </a:lnTo>
-                  <a:lnTo>
-                    <a:pt x="3283945" y="2439525"/>
-                  </a:lnTo>
-                  <a:lnTo>
-                    <a:pt x="3207476" y="2428551"/>
-                  </a:lnTo>
-                  <a:lnTo>
-                    <a:pt x="3131008" y="2417421"/>
-                  </a:lnTo>
-                  <a:lnTo>
-                    <a:pt x="3054539" y="2406133"/>
-                  </a:lnTo>
-                  <a:lnTo>
-                    <a:pt x="2978071" y="2394684"/>
-                  </a:lnTo>
-                  <a:lnTo>
-                    <a:pt x="2901602" y="2383072"/>
-                  </a:lnTo>
-                  <a:lnTo>
-                    <a:pt x="2825134" y="2371296"/>
-                  </a:lnTo>
-                  <a:lnTo>
-                    <a:pt x="2748666" y="2359352"/>
-                  </a:lnTo>
-                  <a:lnTo>
-                    <a:pt x="2672197" y="2347238"/>
-                  </a:lnTo>
-                  <a:lnTo>
-                    <a:pt x="2595729" y="2334952"/>
-                  </a:lnTo>
-                  <a:lnTo>
-                    <a:pt x="2519260" y="2322491"/>
-                  </a:lnTo>
-                  <a:lnTo>
-                    <a:pt x="2442792" y="2309853"/>
-                  </a:lnTo>
-                  <a:lnTo>
-                    <a:pt x="2366323" y="2297036"/>
-                  </a:lnTo>
-                  <a:lnTo>
-                    <a:pt x="2289855" y="2284036"/>
-                  </a:lnTo>
-                  <a:lnTo>
-                    <a:pt x="2213386" y="2270851"/>
-                  </a:lnTo>
-                  <a:lnTo>
-                    <a:pt x="2136918" y="2257479"/>
-                  </a:lnTo>
-                  <a:lnTo>
-                    <a:pt x="2060450" y="2243917"/>
-                  </a:lnTo>
-                  <a:lnTo>
-                    <a:pt x="1983981" y="2230162"/>
-                  </a:lnTo>
-                  <a:lnTo>
-                    <a:pt x="1907513" y="2216212"/>
-                  </a:lnTo>
-                  <a:lnTo>
-                    <a:pt x="1831044" y="2202063"/>
-                  </a:lnTo>
-                  <a:lnTo>
-                    <a:pt x="1754576" y="2187713"/>
-                  </a:lnTo>
-                  <a:lnTo>
-                    <a:pt x="1678107" y="2173159"/>
-                  </a:lnTo>
-                  <a:lnTo>
-                    <a:pt x="1601639" y="2158398"/>
-                  </a:lnTo>
-                  <a:lnTo>
-                    <a:pt x="1525171" y="2143427"/>
-                  </a:lnTo>
-                  <a:lnTo>
-                    <a:pt x="1448702" y="2128244"/>
-                  </a:lnTo>
-                  <a:lnTo>
-                    <a:pt x="1372234" y="2112844"/>
-                  </a:lnTo>
-                  <a:lnTo>
-                    <a:pt x="1295765" y="2097226"/>
-                  </a:lnTo>
-                  <a:lnTo>
-                    <a:pt x="1219297" y="2081386"/>
-                  </a:lnTo>
-                  <a:lnTo>
-                    <a:pt x="1142828" y="2065320"/>
-                  </a:lnTo>
-                  <a:lnTo>
-                    <a:pt x="1066360" y="2049026"/>
-                  </a:lnTo>
-                  <a:lnTo>
-                    <a:pt x="989892" y="2032500"/>
-                  </a:lnTo>
-                  <a:lnTo>
-                    <a:pt x="913423" y="2015740"/>
-                  </a:lnTo>
-                  <a:lnTo>
-                    <a:pt x="836955" y="1998741"/>
-                  </a:lnTo>
-                  <a:lnTo>
-                    <a:pt x="760486" y="1981500"/>
-                  </a:lnTo>
-                  <a:lnTo>
-                    <a:pt x="684018" y="1964015"/>
-                  </a:lnTo>
-                  <a:lnTo>
-                    <a:pt x="607549" y="1946280"/>
-                  </a:lnTo>
-                  <a:lnTo>
-                    <a:pt x="531081" y="1928294"/>
-                  </a:lnTo>
-                  <a:lnTo>
-                    <a:pt x="454613" y="1910052"/>
-                  </a:lnTo>
-                  <a:lnTo>
-                    <a:pt x="378144" y="1891551"/>
-                  </a:lnTo>
-                  <a:lnTo>
-                    <a:pt x="301676" y="1872786"/>
-                  </a:lnTo>
-                  <a:lnTo>
-                    <a:pt x="225207" y="1853755"/>
-                  </a:lnTo>
-                  <a:lnTo>
-                    <a:pt x="148739" y="1834453"/>
-                  </a:lnTo>
-                  <a:lnTo>
-                    <a:pt x="72270" y="1814877"/>
-                  </a:lnTo>
-                  <a:lnTo>
-                    <a:pt x="0" y="1796113"/>
+                    <a:pt x="1372234" y="147103"/>
+                  </a:lnTo>
+                  <a:lnTo>
+                    <a:pt x="1448702" y="311697"/>
+                  </a:lnTo>
+                  <a:lnTo>
+                    <a:pt x="1525171" y="467621"/>
+                  </a:lnTo>
+                  <a:lnTo>
+                    <a:pt x="1601639" y="615333"/>
+                  </a:lnTo>
+                  <a:lnTo>
+                    <a:pt x="1678107" y="755264"/>
+                  </a:lnTo>
+                  <a:lnTo>
+                    <a:pt x="1754576" y="887825"/>
+                  </a:lnTo>
+                  <a:lnTo>
+                    <a:pt x="1831044" y="1013404"/>
+                  </a:lnTo>
+                  <a:lnTo>
+                    <a:pt x="1907513" y="1132369"/>
+                  </a:lnTo>
+                  <a:lnTo>
+                    <a:pt x="1983981" y="1245067"/>
+                  </a:lnTo>
+                  <a:lnTo>
+                    <a:pt x="2060450" y="1351829"/>
+                  </a:lnTo>
+                  <a:lnTo>
+                    <a:pt x="2136918" y="1452969"/>
+                  </a:lnTo>
+                  <a:lnTo>
+                    <a:pt x="2213386" y="1548780"/>
+                  </a:lnTo>
+                  <a:lnTo>
+                    <a:pt x="2289855" y="1639546"/>
+                  </a:lnTo>
+                  <a:lnTo>
+                    <a:pt x="2366323" y="1725530"/>
+                  </a:lnTo>
+                  <a:lnTo>
+                    <a:pt x="2442792" y="1806986"/>
+                  </a:lnTo>
+                  <a:lnTo>
+                    <a:pt x="2519260" y="1884151"/>
+                  </a:lnTo>
+                  <a:lnTo>
+                    <a:pt x="2595729" y="1957252"/>
+                  </a:lnTo>
+                  <a:lnTo>
+                    <a:pt x="2672197" y="2026503"/>
+                  </a:lnTo>
+                  <a:lnTo>
+                    <a:pt x="2748666" y="2092106"/>
+                  </a:lnTo>
+                  <a:lnTo>
+                    <a:pt x="2825134" y="2154253"/>
+                  </a:lnTo>
+                  <a:lnTo>
+                    <a:pt x="2901602" y="2213128"/>
+                  </a:lnTo>
+                  <a:lnTo>
+                    <a:pt x="2978071" y="2268901"/>
+                  </a:lnTo>
+                  <a:lnTo>
+                    <a:pt x="3054539" y="2321736"/>
+                  </a:lnTo>
+                  <a:lnTo>
+                    <a:pt x="3131008" y="2371789"/>
+                  </a:lnTo>
+                  <a:lnTo>
+                    <a:pt x="3207476" y="2419205"/>
+                  </a:lnTo>
+                  <a:lnTo>
+                    <a:pt x="3283945" y="2464124"/>
+                  </a:lnTo>
+                  <a:lnTo>
+                    <a:pt x="3360413" y="2496564"/>
+                  </a:lnTo>
+                  <a:lnTo>
+                    <a:pt x="3436881" y="2507434"/>
+                  </a:lnTo>
+                  <a:lnTo>
+                    <a:pt x="3513350" y="2518151"/>
+                  </a:lnTo>
+                  <a:lnTo>
+                    <a:pt x="3589818" y="2528719"/>
+                  </a:lnTo>
+                  <a:lnTo>
+                    <a:pt x="3666287" y="2539138"/>
+                  </a:lnTo>
+                  <a:lnTo>
+                    <a:pt x="3742755" y="2549411"/>
+                  </a:lnTo>
+                  <a:lnTo>
+                    <a:pt x="3819224" y="2559540"/>
+                  </a:lnTo>
+                  <a:lnTo>
+                    <a:pt x="3895692" y="2569527"/>
+                  </a:lnTo>
+                  <a:lnTo>
+                    <a:pt x="3972160" y="2579374"/>
+                  </a:lnTo>
+                  <a:lnTo>
+                    <a:pt x="4048629" y="2589083"/>
+                  </a:lnTo>
+                  <a:lnTo>
+                    <a:pt x="4125097" y="2598656"/>
+                  </a:lnTo>
+                  <a:lnTo>
+                    <a:pt x="4201566" y="2608094"/>
+                  </a:lnTo>
+                  <a:lnTo>
+                    <a:pt x="4278034" y="2617401"/>
+                  </a:lnTo>
+                  <a:lnTo>
+                    <a:pt x="4354503" y="2626577"/>
+                  </a:lnTo>
+                  <a:lnTo>
+                    <a:pt x="4430971" y="2635624"/>
+                  </a:lnTo>
+                  <a:lnTo>
+                    <a:pt x="4507439" y="2644545"/>
+                  </a:lnTo>
+                  <a:lnTo>
+                    <a:pt x="4583908" y="2653340"/>
+                  </a:lnTo>
+                  <a:lnTo>
+                    <a:pt x="4660376" y="2662012"/>
+                  </a:lnTo>
+                  <a:lnTo>
+                    <a:pt x="4736845" y="2670563"/>
+                  </a:lnTo>
+                  <a:lnTo>
+                    <a:pt x="4813313" y="2678994"/>
+                  </a:lnTo>
+                  <a:lnTo>
+                    <a:pt x="4889782" y="2687306"/>
+                  </a:lnTo>
+                  <a:lnTo>
+                    <a:pt x="4966250" y="2695502"/>
+                  </a:lnTo>
+                  <a:lnTo>
+                    <a:pt x="5042719" y="2703584"/>
+                  </a:lnTo>
+                  <a:lnTo>
+                    <a:pt x="5119187" y="2711551"/>
+                  </a:lnTo>
+                  <a:lnTo>
+                    <a:pt x="5195655" y="2719408"/>
+                  </a:lnTo>
+                  <a:lnTo>
+                    <a:pt x="5272124" y="2727154"/>
+                  </a:lnTo>
+                  <a:lnTo>
+                    <a:pt x="5348592" y="2734791"/>
+                  </a:lnTo>
+                  <a:lnTo>
+                    <a:pt x="5425061" y="2742322"/>
+                  </a:lnTo>
+                  <a:lnTo>
+                    <a:pt x="5501529" y="2749747"/>
+                  </a:lnTo>
+                  <a:lnTo>
+                    <a:pt x="5577998" y="2757068"/>
+                  </a:lnTo>
+                  <a:lnTo>
+                    <a:pt x="5654466" y="2764286"/>
+                  </a:lnTo>
+                  <a:lnTo>
+                    <a:pt x="5730934" y="2771403"/>
+                  </a:lnTo>
+                  <a:lnTo>
+                    <a:pt x="5807403" y="2778420"/>
+                  </a:lnTo>
+                  <a:lnTo>
+                    <a:pt x="5883871" y="2785339"/>
+                  </a:lnTo>
+                  <a:lnTo>
+                    <a:pt x="5960340" y="2792161"/>
+                  </a:lnTo>
+                  <a:lnTo>
+                    <a:pt x="6036808" y="2798887"/>
+                  </a:lnTo>
+                  <a:lnTo>
+                    <a:pt x="6113277" y="2805519"/>
+                  </a:lnTo>
+                  <a:lnTo>
+                    <a:pt x="6189745" y="2812058"/>
+                  </a:lnTo>
+                  <a:lnTo>
+                    <a:pt x="6266213" y="2818506"/>
+                  </a:lnTo>
+                  <a:lnTo>
+                    <a:pt x="6342682" y="2824863"/>
+                  </a:lnTo>
+                  <a:lnTo>
+                    <a:pt x="6419150" y="2831130"/>
+                  </a:lnTo>
+                  <a:lnTo>
+                    <a:pt x="6495619" y="2837310"/>
+                  </a:lnTo>
+                  <a:lnTo>
+                    <a:pt x="6572087" y="2843404"/>
+                  </a:lnTo>
+                  <a:lnTo>
+                    <a:pt x="6648556" y="2849412"/>
+                  </a:lnTo>
+                  <a:lnTo>
+                    <a:pt x="6725024" y="2855336"/>
+                  </a:lnTo>
+                  <a:lnTo>
+                    <a:pt x="6801492" y="2861176"/>
+                  </a:lnTo>
+                  <a:lnTo>
+                    <a:pt x="6877961" y="2866935"/>
+                  </a:lnTo>
+                  <a:lnTo>
+                    <a:pt x="6954429" y="2872613"/>
+                  </a:lnTo>
+                  <a:lnTo>
+                    <a:pt x="7030898" y="2878212"/>
+                  </a:lnTo>
+                  <a:lnTo>
+                    <a:pt x="7107366" y="2883732"/>
+                  </a:lnTo>
+                  <a:lnTo>
+                    <a:pt x="7183835" y="2889175"/>
+                  </a:lnTo>
+                  <a:lnTo>
+                    <a:pt x="7260303" y="2894541"/>
+                  </a:lnTo>
+                  <a:lnTo>
+                    <a:pt x="7260303" y="3223554"/>
+                  </a:lnTo>
+                  <a:lnTo>
+                    <a:pt x="7183835" y="3220860"/>
+                  </a:lnTo>
+                  <a:lnTo>
+                    <a:pt x="7107366" y="3218016"/>
+                  </a:lnTo>
+                  <a:lnTo>
+                    <a:pt x="7030898" y="3215013"/>
+                  </a:lnTo>
+                  <a:lnTo>
+                    <a:pt x="6954429" y="3211844"/>
+                  </a:lnTo>
+                  <a:lnTo>
+                    <a:pt x="6877961" y="3208499"/>
+                  </a:lnTo>
+                  <a:lnTo>
+                    <a:pt x="6801492" y="3204967"/>
+                  </a:lnTo>
+                  <a:lnTo>
+                    <a:pt x="6725024" y="3201239"/>
+                  </a:lnTo>
+                  <a:lnTo>
+                    <a:pt x="6648556" y="3197304"/>
+                  </a:lnTo>
+                  <a:lnTo>
+                    <a:pt x="6572087" y="3193150"/>
+                  </a:lnTo>
+                  <a:lnTo>
+                    <a:pt x="6495619" y="3188765"/>
+                  </a:lnTo>
+                  <a:lnTo>
+                    <a:pt x="6419150" y="3184137"/>
+                  </a:lnTo>
+                  <a:lnTo>
+                    <a:pt x="6342682" y="3179251"/>
+                  </a:lnTo>
+                  <a:lnTo>
+                    <a:pt x="6266213" y="3174093"/>
+                  </a:lnTo>
+                  <a:lnTo>
+                    <a:pt x="6189745" y="3168649"/>
+                  </a:lnTo>
+                  <a:lnTo>
+                    <a:pt x="6113277" y="3162902"/>
+                  </a:lnTo>
+                  <a:lnTo>
+                    <a:pt x="6036808" y="3156835"/>
+                  </a:lnTo>
+                  <a:lnTo>
+                    <a:pt x="5960340" y="3150431"/>
+                  </a:lnTo>
+                  <a:lnTo>
+                    <a:pt x="5883871" y="3143671"/>
+                  </a:lnTo>
+                  <a:lnTo>
+                    <a:pt x="5807403" y="3136535"/>
+                  </a:lnTo>
+                  <a:lnTo>
+                    <a:pt x="5730934" y="3129002"/>
+                  </a:lnTo>
+                  <a:lnTo>
+                    <a:pt x="5654466" y="3121051"/>
+                  </a:lnTo>
+                  <a:lnTo>
+                    <a:pt x="5577998" y="3112657"/>
+                  </a:lnTo>
+                  <a:lnTo>
+                    <a:pt x="5501529" y="3103797"/>
+                  </a:lnTo>
+                  <a:lnTo>
+                    <a:pt x="5425061" y="3094444"/>
+                  </a:lnTo>
+                  <a:lnTo>
+                    <a:pt x="5348592" y="3084571"/>
+                  </a:lnTo>
+                  <a:lnTo>
+                    <a:pt x="5272124" y="3074150"/>
+                  </a:lnTo>
+                  <a:lnTo>
+                    <a:pt x="5195655" y="3063148"/>
+                  </a:lnTo>
+                  <a:lnTo>
+                    <a:pt x="5119187" y="3051535"/>
+                  </a:lnTo>
+                  <a:lnTo>
+                    <a:pt x="5042719" y="3039277"/>
+                  </a:lnTo>
+                  <a:lnTo>
+                    <a:pt x="4966250" y="3026337"/>
+                  </a:lnTo>
+                  <a:lnTo>
+                    <a:pt x="4889782" y="3012677"/>
+                  </a:lnTo>
+                  <a:lnTo>
+                    <a:pt x="4813313" y="2998258"/>
+                  </a:lnTo>
+                  <a:lnTo>
+                    <a:pt x="4736845" y="2983037"/>
+                  </a:lnTo>
+                  <a:lnTo>
+                    <a:pt x="4660376" y="2966970"/>
+                  </a:lnTo>
+                  <a:lnTo>
+                    <a:pt x="4583908" y="2950009"/>
+                  </a:lnTo>
+                  <a:lnTo>
+                    <a:pt x="4507439" y="2932106"/>
+                  </a:lnTo>
+                  <a:lnTo>
+                    <a:pt x="4430971" y="2913207"/>
+                  </a:lnTo>
+                  <a:lnTo>
+                    <a:pt x="4354503" y="2893257"/>
+                  </a:lnTo>
+                  <a:lnTo>
+                    <a:pt x="4278034" y="2872198"/>
+                  </a:lnTo>
+                  <a:lnTo>
+                    <a:pt x="4201566" y="2849968"/>
+                  </a:lnTo>
+                  <a:lnTo>
+                    <a:pt x="4125097" y="2826503"/>
+                  </a:lnTo>
+                  <a:lnTo>
+                    <a:pt x="4048629" y="2801732"/>
+                  </a:lnTo>
+                  <a:lnTo>
+                    <a:pt x="3972160" y="2775584"/>
+                  </a:lnTo>
+                  <a:lnTo>
+                    <a:pt x="3895692" y="2747983"/>
+                  </a:lnTo>
+                  <a:lnTo>
+                    <a:pt x="3819224" y="2718847"/>
+                  </a:lnTo>
+                  <a:lnTo>
+                    <a:pt x="3742755" y="2688091"/>
+                  </a:lnTo>
+                  <a:lnTo>
+                    <a:pt x="3666287" y="2655624"/>
+                  </a:lnTo>
+                  <a:lnTo>
+                    <a:pt x="3589818" y="2621353"/>
+                  </a:lnTo>
+                  <a:lnTo>
+                    <a:pt x="3513350" y="2585176"/>
+                  </a:lnTo>
+                  <a:lnTo>
+                    <a:pt x="3436881" y="2546988"/>
+                  </a:lnTo>
+                  <a:lnTo>
+                    <a:pt x="3360413" y="2506677"/>
+                  </a:lnTo>
+                  <a:lnTo>
+                    <a:pt x="3283945" y="2485540"/>
+                  </a:lnTo>
+                  <a:lnTo>
+                    <a:pt x="3207476" y="2474359"/>
+                  </a:lnTo>
+                  <a:lnTo>
+                    <a:pt x="3131008" y="2463019"/>
+                  </a:lnTo>
+                  <a:lnTo>
+                    <a:pt x="3054539" y="2451518"/>
+                  </a:lnTo>
+                  <a:lnTo>
+                    <a:pt x="2978071" y="2439853"/>
+                  </a:lnTo>
+                  <a:lnTo>
+                    <a:pt x="2901602" y="2428022"/>
+                  </a:lnTo>
+                  <a:lnTo>
+                    <a:pt x="2825134" y="2416024"/>
+                  </a:lnTo>
+                  <a:lnTo>
+                    <a:pt x="2748666" y="2403854"/>
+                  </a:lnTo>
+                  <a:lnTo>
+                    <a:pt x="2672197" y="2391512"/>
+                  </a:lnTo>
+                  <a:lnTo>
+                    <a:pt x="2595729" y="2378994"/>
+                  </a:lnTo>
+                  <a:lnTo>
+                    <a:pt x="2519260" y="2366298"/>
+                  </a:lnTo>
+                  <a:lnTo>
+                    <a:pt x="2442792" y="2353422"/>
+                  </a:lnTo>
+                  <a:lnTo>
+                    <a:pt x="2366323" y="2340363"/>
+                  </a:lnTo>
+                  <a:lnTo>
+                    <a:pt x="2289855" y="2327118"/>
+                  </a:lnTo>
+                  <a:lnTo>
+                    <a:pt x="2213386" y="2313685"/>
+                  </a:lnTo>
+                  <a:lnTo>
+                    <a:pt x="2136918" y="2300060"/>
+                  </a:lnTo>
+                  <a:lnTo>
+                    <a:pt x="2060450" y="2286242"/>
+                  </a:lnTo>
+                  <a:lnTo>
+                    <a:pt x="1983981" y="2272228"/>
+                  </a:lnTo>
+                  <a:lnTo>
+                    <a:pt x="1907513" y="2258014"/>
+                  </a:lnTo>
+                  <a:lnTo>
+                    <a:pt x="1831044" y="2243599"/>
+                  </a:lnTo>
+                  <a:lnTo>
+                    <a:pt x="1754576" y="2228978"/>
+                  </a:lnTo>
+                  <a:lnTo>
+                    <a:pt x="1678107" y="2214149"/>
+                  </a:lnTo>
+                  <a:lnTo>
+                    <a:pt x="1601639" y="2199110"/>
+                  </a:lnTo>
+                  <a:lnTo>
+                    <a:pt x="1525171" y="2183857"/>
+                  </a:lnTo>
+                  <a:lnTo>
+                    <a:pt x="1448702" y="2168387"/>
+                  </a:lnTo>
+                  <a:lnTo>
+                    <a:pt x="1372234" y="2152697"/>
+                  </a:lnTo>
+                  <a:lnTo>
+                    <a:pt x="1295765" y="2136784"/>
+                  </a:lnTo>
+                  <a:lnTo>
+                    <a:pt x="1219297" y="2120645"/>
+                  </a:lnTo>
+                  <a:lnTo>
+                    <a:pt x="1142828" y="2104276"/>
+                  </a:lnTo>
+                  <a:lnTo>
+                    <a:pt x="1066360" y="2087675"/>
+                  </a:lnTo>
+                  <a:lnTo>
+                    <a:pt x="989892" y="2070838"/>
+                  </a:lnTo>
+                  <a:lnTo>
+                    <a:pt x="913423" y="2053761"/>
+                  </a:lnTo>
+                  <a:lnTo>
+                    <a:pt x="836955" y="2036442"/>
+                  </a:lnTo>
+                  <a:lnTo>
+                    <a:pt x="760486" y="2018876"/>
+                  </a:lnTo>
+                  <a:lnTo>
+                    <a:pt x="684018" y="2001060"/>
+                  </a:lnTo>
+                  <a:lnTo>
+                    <a:pt x="607549" y="1982992"/>
+                  </a:lnTo>
+                  <a:lnTo>
+                    <a:pt x="531081" y="1964666"/>
+                  </a:lnTo>
+                  <a:lnTo>
+                    <a:pt x="454613" y="1946080"/>
+                  </a:lnTo>
+                  <a:lnTo>
+                    <a:pt x="378144" y="1927230"/>
+                  </a:lnTo>
+                  <a:lnTo>
+                    <a:pt x="301676" y="1908111"/>
+                  </a:lnTo>
+                  <a:lnTo>
+                    <a:pt x="225207" y="1888721"/>
+                  </a:lnTo>
+                  <a:lnTo>
+                    <a:pt x="148739" y="1869055"/>
+                  </a:lnTo>
+                  <a:lnTo>
+                    <a:pt x="72270" y="1849110"/>
+                  </a:lnTo>
+                  <a:lnTo>
+                    <a:pt x="0" y="1829991"/>
                   </a:lnTo>
                   <a:close/>
                 </a:path>
@@ -3552,255 +3939,255 @@
         </p:sp>
         <p:sp>
           <p:nvSpPr>
-            <p:cNvPr id="22" name="pl22"/>
+            <p:cNvPr id="31" name="pl31"/>
             <p:cNvSpPr/>
             <p:nvPr/>
           </p:nvSpPr>
           <p:spPr>
             <a:xfrm>
-              <a:off x="2223136" y="2209169"/>
-              <a:ext cx="5952812" cy="2840954"/>
+              <a:off x="2223136" y="2185486"/>
+              <a:ext cx="5952812" cy="2894541"/>
             </a:xfrm>
             <a:custGeom>
               <a:avLst/>
               <a:pathLst>
-                <a:path w="5952812" h="2840954">
+                <a:path w="5952812" h="2894541">
                   <a:moveTo>
                     <a:pt x="0" y="0"/>
                   </a:moveTo>
                   <a:lnTo>
-                    <a:pt x="64742" y="144379"/>
-                  </a:lnTo>
-                  <a:lnTo>
-                    <a:pt x="141211" y="305926"/>
-                  </a:lnTo>
-                  <a:lnTo>
-                    <a:pt x="217679" y="458964"/>
-                  </a:lnTo>
-                  <a:lnTo>
-                    <a:pt x="294148" y="603941"/>
-                  </a:lnTo>
-                  <a:lnTo>
-                    <a:pt x="370616" y="741282"/>
-                  </a:lnTo>
-                  <a:lnTo>
-                    <a:pt x="447084" y="871389"/>
-                  </a:lnTo>
-                  <a:lnTo>
-                    <a:pt x="523553" y="994643"/>
-                  </a:lnTo>
-                  <a:lnTo>
-                    <a:pt x="600021" y="1111405"/>
-                  </a:lnTo>
-                  <a:lnTo>
-                    <a:pt x="676490" y="1222017"/>
-                  </a:lnTo>
-                  <a:lnTo>
-                    <a:pt x="752958" y="1326803"/>
-                  </a:lnTo>
-                  <a:lnTo>
-                    <a:pt x="829427" y="1426070"/>
-                  </a:lnTo>
-                  <a:lnTo>
-                    <a:pt x="905895" y="1520108"/>
-                  </a:lnTo>
-                  <a:lnTo>
-                    <a:pt x="982363" y="1609193"/>
-                  </a:lnTo>
-                  <a:lnTo>
-                    <a:pt x="1058832" y="1693586"/>
-                  </a:lnTo>
-                  <a:lnTo>
-                    <a:pt x="1135300" y="1773533"/>
-                  </a:lnTo>
-                  <a:lnTo>
-                    <a:pt x="1211769" y="1849270"/>
-                  </a:lnTo>
-                  <a:lnTo>
-                    <a:pt x="1288237" y="1921018"/>
-                  </a:lnTo>
-                  <a:lnTo>
-                    <a:pt x="1364706" y="1988986"/>
-                  </a:lnTo>
-                  <a:lnTo>
-                    <a:pt x="1441174" y="2053375"/>
-                  </a:lnTo>
-                  <a:lnTo>
-                    <a:pt x="1517642" y="2114372"/>
-                  </a:lnTo>
-                  <a:lnTo>
-                    <a:pt x="1594111" y="2172156"/>
-                  </a:lnTo>
-                  <a:lnTo>
-                    <a:pt x="1670579" y="2226896"/>
-                  </a:lnTo>
-                  <a:lnTo>
-                    <a:pt x="1747048" y="2278754"/>
-                  </a:lnTo>
-                  <a:lnTo>
-                    <a:pt x="1823516" y="2327880"/>
-                  </a:lnTo>
-                  <a:lnTo>
-                    <a:pt x="1899985" y="2374418"/>
-                  </a:lnTo>
-                  <a:lnTo>
-                    <a:pt x="1976453" y="2418505"/>
-                  </a:lnTo>
-                  <a:lnTo>
-                    <a:pt x="2052921" y="2450345"/>
-                  </a:lnTo>
-                  <a:lnTo>
-                    <a:pt x="2129390" y="2461014"/>
-                  </a:lnTo>
-                  <a:lnTo>
-                    <a:pt x="2205858" y="2471533"/>
-                  </a:lnTo>
-                  <a:lnTo>
-                    <a:pt x="2282327" y="2481904"/>
-                  </a:lnTo>
-                  <a:lnTo>
-                    <a:pt x="2358795" y="2492131"/>
-                  </a:lnTo>
-                  <a:lnTo>
-                    <a:pt x="2435264" y="2502213"/>
-                  </a:lnTo>
-                  <a:lnTo>
-                    <a:pt x="2511732" y="2512155"/>
-                  </a:lnTo>
-                  <a:lnTo>
-                    <a:pt x="2588201" y="2521957"/>
-                  </a:lnTo>
-                  <a:lnTo>
-                    <a:pt x="2664669" y="2531622"/>
-                  </a:lnTo>
-                  <a:lnTo>
-                    <a:pt x="2741137" y="2541151"/>
-                  </a:lnTo>
-                  <a:lnTo>
-                    <a:pt x="2817606" y="2550547"/>
-                  </a:lnTo>
-                  <a:lnTo>
-                    <a:pt x="2894074" y="2559811"/>
-                  </a:lnTo>
-                  <a:lnTo>
-                    <a:pt x="2970543" y="2568945"/>
-                  </a:lnTo>
-                  <a:lnTo>
-                    <a:pt x="3047011" y="2577951"/>
-                  </a:lnTo>
-                  <a:lnTo>
-                    <a:pt x="3123480" y="2586831"/>
-                  </a:lnTo>
-                  <a:lnTo>
-                    <a:pt x="3199948" y="2595586"/>
-                  </a:lnTo>
-                  <a:lnTo>
-                    <a:pt x="3276416" y="2604219"/>
-                  </a:lnTo>
-                  <a:lnTo>
-                    <a:pt x="3352885" y="2612730"/>
-                  </a:lnTo>
-                  <a:lnTo>
-                    <a:pt x="3429353" y="2621123"/>
-                  </a:lnTo>
-                  <a:lnTo>
-                    <a:pt x="3505822" y="2629397"/>
-                  </a:lnTo>
-                  <a:lnTo>
-                    <a:pt x="3582290" y="2637556"/>
-                  </a:lnTo>
-                  <a:lnTo>
-                    <a:pt x="3658759" y="2645601"/>
-                  </a:lnTo>
-                  <a:lnTo>
-                    <a:pt x="3735227" y="2653532"/>
-                  </a:lnTo>
-                  <a:lnTo>
-                    <a:pt x="3811695" y="2661352"/>
-                  </a:lnTo>
-                  <a:lnTo>
-                    <a:pt x="3888164" y="2669063"/>
-                  </a:lnTo>
-                  <a:lnTo>
-                    <a:pt x="3964632" y="2676666"/>
-                  </a:lnTo>
-                  <a:lnTo>
-                    <a:pt x="4041101" y="2684162"/>
-                  </a:lnTo>
-                  <a:lnTo>
-                    <a:pt x="4117569" y="2691553"/>
-                  </a:lnTo>
-                  <a:lnTo>
-                    <a:pt x="4194038" y="2698841"/>
-                  </a:lnTo>
-                  <a:lnTo>
-                    <a:pt x="4270506" y="2706026"/>
-                  </a:lnTo>
-                  <a:lnTo>
-                    <a:pt x="4346974" y="2713110"/>
-                  </a:lnTo>
-                  <a:lnTo>
-                    <a:pt x="4423443" y="2720096"/>
-                  </a:lnTo>
-                  <a:lnTo>
-                    <a:pt x="4499911" y="2726983"/>
-                  </a:lnTo>
-                  <a:lnTo>
-                    <a:pt x="4576380" y="2733774"/>
-                  </a:lnTo>
-                  <a:lnTo>
-                    <a:pt x="4652848" y="2740469"/>
-                  </a:lnTo>
-                  <a:lnTo>
-                    <a:pt x="4729317" y="2747071"/>
-                  </a:lnTo>
-                  <a:lnTo>
-                    <a:pt x="4805785" y="2753580"/>
-                  </a:lnTo>
-                  <a:lnTo>
-                    <a:pt x="4882254" y="2759998"/>
-                  </a:lnTo>
-                  <a:lnTo>
-                    <a:pt x="4958722" y="2766326"/>
-                  </a:lnTo>
-                  <a:lnTo>
-                    <a:pt x="5035190" y="2772566"/>
-                  </a:lnTo>
-                  <a:lnTo>
-                    <a:pt x="5111659" y="2778718"/>
-                  </a:lnTo>
-                  <a:lnTo>
-                    <a:pt x="5188127" y="2784783"/>
-                  </a:lnTo>
-                  <a:lnTo>
-                    <a:pt x="5264596" y="2790764"/>
-                  </a:lnTo>
-                  <a:lnTo>
-                    <a:pt x="5341064" y="2796661"/>
-                  </a:lnTo>
-                  <a:lnTo>
-                    <a:pt x="5417533" y="2802475"/>
-                  </a:lnTo>
-                  <a:lnTo>
-                    <a:pt x="5494001" y="2808207"/>
-                  </a:lnTo>
-                  <a:lnTo>
-                    <a:pt x="5570469" y="2813860"/>
-                  </a:lnTo>
-                  <a:lnTo>
-                    <a:pt x="5646938" y="2819433"/>
-                  </a:lnTo>
-                  <a:lnTo>
-                    <a:pt x="5723406" y="2824928"/>
-                  </a:lnTo>
-                  <a:lnTo>
-                    <a:pt x="5799875" y="2830345"/>
-                  </a:lnTo>
-                  <a:lnTo>
-                    <a:pt x="5876343" y="2835687"/>
-                  </a:lnTo>
-                  <a:lnTo>
-                    <a:pt x="5952812" y="2840954"/>
+                    <a:pt x="64742" y="147103"/>
+                  </a:lnTo>
+                  <a:lnTo>
+                    <a:pt x="141211" y="311697"/>
+                  </a:lnTo>
+                  <a:lnTo>
+                    <a:pt x="217679" y="467621"/>
+                  </a:lnTo>
+                  <a:lnTo>
+                    <a:pt x="294148" y="615333"/>
+                  </a:lnTo>
+                  <a:lnTo>
+                    <a:pt x="370616" y="755264"/>
+                  </a:lnTo>
+                  <a:lnTo>
+                    <a:pt x="447084" y="887825"/>
+                  </a:lnTo>
+                  <a:lnTo>
+                    <a:pt x="523553" y="1013404"/>
+                  </a:lnTo>
+                  <a:lnTo>
+                    <a:pt x="600021" y="1132369"/>
+                  </a:lnTo>
+                  <a:lnTo>
+                    <a:pt x="676490" y="1245067"/>
+                  </a:lnTo>
+                  <a:lnTo>
+                    <a:pt x="752958" y="1351829"/>
+                  </a:lnTo>
+                  <a:lnTo>
+                    <a:pt x="829427" y="1452969"/>
+                  </a:lnTo>
+                  <a:lnTo>
+                    <a:pt x="905895" y="1548780"/>
+                  </a:lnTo>
+                  <a:lnTo>
+                    <a:pt x="982363" y="1639546"/>
+                  </a:lnTo>
+                  <a:lnTo>
+                    <a:pt x="1058832" y="1725530"/>
+                  </a:lnTo>
+                  <a:lnTo>
+                    <a:pt x="1135300" y="1806986"/>
+                  </a:lnTo>
+                  <a:lnTo>
+                    <a:pt x="1211769" y="1884151"/>
+                  </a:lnTo>
+                  <a:lnTo>
+                    <a:pt x="1288237" y="1957252"/>
+                  </a:lnTo>
+                  <a:lnTo>
+                    <a:pt x="1364706" y="2026503"/>
+                  </a:lnTo>
+                  <a:lnTo>
+                    <a:pt x="1441174" y="2092106"/>
+                  </a:lnTo>
+                  <a:lnTo>
+                    <a:pt x="1517642" y="2154253"/>
+                  </a:lnTo>
+                  <a:lnTo>
+                    <a:pt x="1594111" y="2213128"/>
+                  </a:lnTo>
+                  <a:lnTo>
+                    <a:pt x="1670579" y="2268901"/>
+                  </a:lnTo>
+                  <a:lnTo>
+                    <a:pt x="1747048" y="2321736"/>
+                  </a:lnTo>
+                  <a:lnTo>
+                    <a:pt x="1823516" y="2371789"/>
+                  </a:lnTo>
+                  <a:lnTo>
+                    <a:pt x="1899985" y="2419205"/>
+                  </a:lnTo>
+                  <a:lnTo>
+                    <a:pt x="1976453" y="2464124"/>
+                  </a:lnTo>
+                  <a:lnTo>
+                    <a:pt x="2052921" y="2496564"/>
+                  </a:lnTo>
+                  <a:lnTo>
+                    <a:pt x="2129390" y="2507434"/>
+                  </a:lnTo>
+                  <a:lnTo>
+                    <a:pt x="2205858" y="2518151"/>
+                  </a:lnTo>
+                  <a:lnTo>
+                    <a:pt x="2282327" y="2528719"/>
+                  </a:lnTo>
+                  <a:lnTo>
+                    <a:pt x="2358795" y="2539138"/>
+                  </a:lnTo>
+                  <a:lnTo>
+                    <a:pt x="2435264" y="2549411"/>
+                  </a:lnTo>
+                  <a:lnTo>
+                    <a:pt x="2511732" y="2559540"/>
+                  </a:lnTo>
+                  <a:lnTo>
+                    <a:pt x="2588201" y="2569527"/>
+                  </a:lnTo>
+                  <a:lnTo>
+                    <a:pt x="2664669" y="2579374"/>
+                  </a:lnTo>
+                  <a:lnTo>
+                    <a:pt x="2741137" y="2589083"/>
+                  </a:lnTo>
+                  <a:lnTo>
+                    <a:pt x="2817606" y="2598656"/>
+                  </a:lnTo>
+                  <a:lnTo>
+                    <a:pt x="2894074" y="2608094"/>
+                  </a:lnTo>
+                  <a:lnTo>
+                    <a:pt x="2970543" y="2617401"/>
+                  </a:lnTo>
+                  <a:lnTo>
+                    <a:pt x="3047011" y="2626577"/>
+                  </a:lnTo>
+                  <a:lnTo>
+                    <a:pt x="3123480" y="2635624"/>
+                  </a:lnTo>
+                  <a:lnTo>
+                    <a:pt x="3199948" y="2644545"/>
+                  </a:lnTo>
+                  <a:lnTo>
+                    <a:pt x="3276416" y="2653340"/>
+                  </a:lnTo>
+                  <a:lnTo>
+                    <a:pt x="3352885" y="2662012"/>
+                  </a:lnTo>
+                  <a:lnTo>
+                    <a:pt x="3429353" y="2670563"/>
+                  </a:lnTo>
+                  <a:lnTo>
+                    <a:pt x="3505822" y="2678994"/>
+                  </a:lnTo>
+                  <a:lnTo>
+                    <a:pt x="3582290" y="2687306"/>
+                  </a:lnTo>
+                  <a:lnTo>
+                    <a:pt x="3658759" y="2695502"/>
+                  </a:lnTo>
+                  <a:lnTo>
+                    <a:pt x="3735227" y="2703584"/>
+                  </a:lnTo>
+                  <a:lnTo>
+                    <a:pt x="3811695" y="2711551"/>
+                  </a:lnTo>
+                  <a:lnTo>
+                    <a:pt x="3888164" y="2719408"/>
+                  </a:lnTo>
+                  <a:lnTo>
+                    <a:pt x="3964632" y="2727154"/>
+                  </a:lnTo>
+                  <a:lnTo>
+                    <a:pt x="4041101" y="2734791"/>
+                  </a:lnTo>
+                  <a:lnTo>
+                    <a:pt x="4117569" y="2742322"/>
+                  </a:lnTo>
+                  <a:lnTo>
+                    <a:pt x="4194038" y="2749747"/>
+                  </a:lnTo>
+                  <a:lnTo>
+                    <a:pt x="4270506" y="2757068"/>
+                  </a:lnTo>
+                  <a:lnTo>
+                    <a:pt x="4346974" y="2764286"/>
+                  </a:lnTo>
+                  <a:lnTo>
+                    <a:pt x="4423443" y="2771403"/>
+                  </a:lnTo>
+                  <a:lnTo>
+                    <a:pt x="4499911" y="2778420"/>
+                  </a:lnTo>
+                  <a:lnTo>
+                    <a:pt x="4576380" y="2785339"/>
+                  </a:lnTo>
+                  <a:lnTo>
+                    <a:pt x="4652848" y="2792161"/>
+                  </a:lnTo>
+                  <a:lnTo>
+                    <a:pt x="4729317" y="2798887"/>
+                  </a:lnTo>
+                  <a:lnTo>
+                    <a:pt x="4805785" y="2805519"/>
+                  </a:lnTo>
+                  <a:lnTo>
+                    <a:pt x="4882254" y="2812058"/>
+                  </a:lnTo>
+                  <a:lnTo>
+                    <a:pt x="4958722" y="2818506"/>
+                  </a:lnTo>
+                  <a:lnTo>
+                    <a:pt x="5035190" y="2824863"/>
+                  </a:lnTo>
+                  <a:lnTo>
+                    <a:pt x="5111659" y="2831130"/>
+                  </a:lnTo>
+                  <a:lnTo>
+                    <a:pt x="5188127" y="2837310"/>
+                  </a:lnTo>
+                  <a:lnTo>
+                    <a:pt x="5264596" y="2843404"/>
+                  </a:lnTo>
+                  <a:lnTo>
+                    <a:pt x="5341064" y="2849412"/>
+                  </a:lnTo>
+                  <a:lnTo>
+                    <a:pt x="5417533" y="2855336"/>
+                  </a:lnTo>
+                  <a:lnTo>
+                    <a:pt x="5494001" y="2861176"/>
+                  </a:lnTo>
+                  <a:lnTo>
+                    <a:pt x="5570469" y="2866935"/>
+                  </a:lnTo>
+                  <a:lnTo>
+                    <a:pt x="5646938" y="2872613"/>
+                  </a:lnTo>
+                  <a:lnTo>
+                    <a:pt x="5723406" y="2878212"/>
+                  </a:lnTo>
+                  <a:lnTo>
+                    <a:pt x="5799875" y="2883732"/>
+                  </a:lnTo>
+                  <a:lnTo>
+                    <a:pt x="5876343" y="2889175"/>
+                  </a:lnTo>
+                  <a:lnTo>
+                    <a:pt x="5952812" y="2894541"/>
                   </a:lnTo>
                 </a:path>
               </a:pathLst>
@@ -3814,303 +4201,303 @@
         </p:sp>
         <p:sp>
           <p:nvSpPr>
-            <p:cNvPr id="23" name="pl23"/>
+            <p:cNvPr id="32" name="pl32"/>
             <p:cNvSpPr/>
             <p:nvPr/>
           </p:nvSpPr>
           <p:spPr>
             <a:xfrm>
-              <a:off x="915645" y="4005282"/>
-              <a:ext cx="7260303" cy="1367763"/>
+              <a:off x="915645" y="4015478"/>
+              <a:ext cx="7260303" cy="1393562"/>
             </a:xfrm>
             <a:custGeom>
               <a:avLst/>
               <a:pathLst>
-                <a:path w="7260303" h="1367763">
+                <a:path w="7260303" h="1393562">
                   <a:moveTo>
-                    <a:pt x="7260303" y="1367763"/>
+                    <a:pt x="7260303" y="1393562"/>
                   </a:moveTo>
                   <a:lnTo>
-                    <a:pt x="7183835" y="1365119"/>
-                  </a:lnTo>
-                  <a:lnTo>
-                    <a:pt x="7107366" y="1362327"/>
-                  </a:lnTo>
-                  <a:lnTo>
-                    <a:pt x="7030898" y="1359381"/>
-                  </a:lnTo>
-                  <a:lnTo>
-                    <a:pt x="6954429" y="1356270"/>
-                  </a:lnTo>
-                  <a:lnTo>
-                    <a:pt x="6877961" y="1352986"/>
-                  </a:lnTo>
-                  <a:lnTo>
-                    <a:pt x="6801492" y="1349520"/>
-                  </a:lnTo>
-                  <a:lnTo>
-                    <a:pt x="6725024" y="1345862"/>
-                  </a:lnTo>
-                  <a:lnTo>
-                    <a:pt x="6648556" y="1341999"/>
-                  </a:lnTo>
-                  <a:lnTo>
-                    <a:pt x="6572087" y="1337922"/>
-                  </a:lnTo>
-                  <a:lnTo>
-                    <a:pt x="6495619" y="1333619"/>
-                  </a:lnTo>
-                  <a:lnTo>
-                    <a:pt x="6419150" y="1329076"/>
-                  </a:lnTo>
-                  <a:lnTo>
-                    <a:pt x="6342682" y="1324280"/>
-                  </a:lnTo>
-                  <a:lnTo>
-                    <a:pt x="6266213" y="1319218"/>
-                  </a:lnTo>
-                  <a:lnTo>
-                    <a:pt x="6189745" y="1313874"/>
-                  </a:lnTo>
-                  <a:lnTo>
-                    <a:pt x="6113277" y="1308234"/>
-                  </a:lnTo>
-                  <a:lnTo>
-                    <a:pt x="6036808" y="1302279"/>
-                  </a:lnTo>
-                  <a:lnTo>
-                    <a:pt x="5960340" y="1295994"/>
-                  </a:lnTo>
-                  <a:lnTo>
-                    <a:pt x="5883871" y="1289359"/>
-                  </a:lnTo>
-                  <a:lnTo>
-                    <a:pt x="5807403" y="1282355"/>
-                  </a:lnTo>
-                  <a:lnTo>
-                    <a:pt x="5730934" y="1274962"/>
-                  </a:lnTo>
-                  <a:lnTo>
-                    <a:pt x="5654466" y="1267158"/>
-                  </a:lnTo>
-                  <a:lnTo>
-                    <a:pt x="5577998" y="1258920"/>
-                  </a:lnTo>
-                  <a:lnTo>
-                    <a:pt x="5501529" y="1250224"/>
-                  </a:lnTo>
-                  <a:lnTo>
-                    <a:pt x="5425061" y="1241044"/>
-                  </a:lnTo>
-                  <a:lnTo>
-                    <a:pt x="5348592" y="1231354"/>
-                  </a:lnTo>
-                  <a:lnTo>
-                    <a:pt x="5272124" y="1221125"/>
-                  </a:lnTo>
-                  <a:lnTo>
-                    <a:pt x="5195655" y="1210327"/>
-                  </a:lnTo>
-                  <a:lnTo>
-                    <a:pt x="5119187" y="1198929"/>
-                  </a:lnTo>
-                  <a:lnTo>
-                    <a:pt x="5042719" y="1186898"/>
-                  </a:lnTo>
-                  <a:lnTo>
-                    <a:pt x="4966250" y="1174197"/>
-                  </a:lnTo>
-                  <a:lnTo>
-                    <a:pt x="4889782" y="1160790"/>
-                  </a:lnTo>
-                  <a:lnTo>
-                    <a:pt x="4813313" y="1146638"/>
-                  </a:lnTo>
-                  <a:lnTo>
-                    <a:pt x="4736845" y="1131699"/>
-                  </a:lnTo>
-                  <a:lnTo>
-                    <a:pt x="4660376" y="1115929"/>
-                  </a:lnTo>
-                  <a:lnTo>
-                    <a:pt x="4583908" y="1099283"/>
-                  </a:lnTo>
-                  <a:lnTo>
-                    <a:pt x="4507439" y="1081711"/>
-                  </a:lnTo>
-                  <a:lnTo>
-                    <a:pt x="4430971" y="1063162"/>
-                  </a:lnTo>
-                  <a:lnTo>
-                    <a:pt x="4354503" y="1043581"/>
-                  </a:lnTo>
-                  <a:lnTo>
-                    <a:pt x="4278034" y="1022912"/>
-                  </a:lnTo>
-                  <a:lnTo>
-                    <a:pt x="4201566" y="1001094"/>
-                  </a:lnTo>
-                  <a:lnTo>
-                    <a:pt x="4125097" y="978062"/>
-                  </a:lnTo>
-                  <a:lnTo>
-                    <a:pt x="4048629" y="953751"/>
-                  </a:lnTo>
-                  <a:lnTo>
-                    <a:pt x="3972160" y="928087"/>
-                  </a:lnTo>
-                  <a:lnTo>
-                    <a:pt x="3895692" y="900996"/>
-                  </a:lnTo>
-                  <a:lnTo>
-                    <a:pt x="3819224" y="872400"/>
-                  </a:lnTo>
-                  <a:lnTo>
-                    <a:pt x="3742755" y="842213"/>
-                  </a:lnTo>
-                  <a:lnTo>
-                    <a:pt x="3666287" y="810348"/>
-                  </a:lnTo>
-                  <a:lnTo>
-                    <a:pt x="3589818" y="776711"/>
-                  </a:lnTo>
-                  <a:lnTo>
-                    <a:pt x="3513350" y="741204"/>
-                  </a:lnTo>
-                  <a:lnTo>
-                    <a:pt x="3436881" y="703723"/>
-                  </a:lnTo>
-                  <a:lnTo>
-                    <a:pt x="3360413" y="664157"/>
-                  </a:lnTo>
-                  <a:lnTo>
-                    <a:pt x="3283945" y="643412"/>
-                  </a:lnTo>
-                  <a:lnTo>
-                    <a:pt x="3207476" y="632438"/>
-                  </a:lnTo>
-                  <a:lnTo>
-                    <a:pt x="3131008" y="621308"/>
-                  </a:lnTo>
-                  <a:lnTo>
-                    <a:pt x="3054539" y="610020"/>
-                  </a:lnTo>
-                  <a:lnTo>
-                    <a:pt x="2978071" y="598571"/>
-                  </a:lnTo>
-                  <a:lnTo>
-                    <a:pt x="2901602" y="586959"/>
-                  </a:lnTo>
-                  <a:lnTo>
-                    <a:pt x="2825134" y="575183"/>
-                  </a:lnTo>
-                  <a:lnTo>
-                    <a:pt x="2748666" y="563239"/>
-                  </a:lnTo>
-                  <a:lnTo>
-                    <a:pt x="2672197" y="551125"/>
-                  </a:lnTo>
-                  <a:lnTo>
-                    <a:pt x="2595729" y="538839"/>
-                  </a:lnTo>
-                  <a:lnTo>
-                    <a:pt x="2519260" y="526378"/>
-                  </a:lnTo>
-                  <a:lnTo>
-                    <a:pt x="2442792" y="513740"/>
-                  </a:lnTo>
-                  <a:lnTo>
-                    <a:pt x="2366323" y="500923"/>
-                  </a:lnTo>
-                  <a:lnTo>
-                    <a:pt x="2289855" y="487923"/>
-                  </a:lnTo>
-                  <a:lnTo>
-                    <a:pt x="2213386" y="474738"/>
-                  </a:lnTo>
-                  <a:lnTo>
-                    <a:pt x="2136918" y="461366"/>
-                  </a:lnTo>
-                  <a:lnTo>
-                    <a:pt x="2060450" y="447804"/>
-                  </a:lnTo>
-                  <a:lnTo>
-                    <a:pt x="1983981" y="434049"/>
-                  </a:lnTo>
-                  <a:lnTo>
-                    <a:pt x="1907513" y="420099"/>
-                  </a:lnTo>
-                  <a:lnTo>
-                    <a:pt x="1831044" y="405950"/>
-                  </a:lnTo>
-                  <a:lnTo>
-                    <a:pt x="1754576" y="391600"/>
-                  </a:lnTo>
-                  <a:lnTo>
-                    <a:pt x="1678107" y="377046"/>
-                  </a:lnTo>
-                  <a:lnTo>
-                    <a:pt x="1601639" y="362285"/>
-                  </a:lnTo>
-                  <a:lnTo>
-                    <a:pt x="1525171" y="347314"/>
-                  </a:lnTo>
-                  <a:lnTo>
-                    <a:pt x="1448702" y="332131"/>
-                  </a:lnTo>
-                  <a:lnTo>
-                    <a:pt x="1372234" y="316731"/>
-                  </a:lnTo>
-                  <a:lnTo>
-                    <a:pt x="1295765" y="301113"/>
-                  </a:lnTo>
-                  <a:lnTo>
-                    <a:pt x="1219297" y="285272"/>
-                  </a:lnTo>
-                  <a:lnTo>
-                    <a:pt x="1142828" y="269207"/>
-                  </a:lnTo>
-                  <a:lnTo>
-                    <a:pt x="1066360" y="252913"/>
-                  </a:lnTo>
-                  <a:lnTo>
-                    <a:pt x="989892" y="236387"/>
-                  </a:lnTo>
-                  <a:lnTo>
-                    <a:pt x="913423" y="219627"/>
-                  </a:lnTo>
-                  <a:lnTo>
-                    <a:pt x="836955" y="202628"/>
-                  </a:lnTo>
-                  <a:lnTo>
-                    <a:pt x="760486" y="185387"/>
-                  </a:lnTo>
-                  <a:lnTo>
-                    <a:pt x="684018" y="167902"/>
-                  </a:lnTo>
-                  <a:lnTo>
-                    <a:pt x="607549" y="150167"/>
-                  </a:lnTo>
-                  <a:lnTo>
-                    <a:pt x="531081" y="132181"/>
-                  </a:lnTo>
-                  <a:lnTo>
-                    <a:pt x="454613" y="113939"/>
-                  </a:lnTo>
-                  <a:lnTo>
-                    <a:pt x="378144" y="95438"/>
-                  </a:lnTo>
-                  <a:lnTo>
-                    <a:pt x="301676" y="76673"/>
-                  </a:lnTo>
-                  <a:lnTo>
-                    <a:pt x="225207" y="57642"/>
-                  </a:lnTo>
-                  <a:lnTo>
-                    <a:pt x="148739" y="38340"/>
-                  </a:lnTo>
-                  <a:lnTo>
-                    <a:pt x="72270" y="18764"/>
+                    <a:pt x="7183835" y="1390868"/>
+                  </a:lnTo>
+                  <a:lnTo>
+                    <a:pt x="7107366" y="1388024"/>
+                  </a:lnTo>
+                  <a:lnTo>
+                    <a:pt x="7030898" y="1385021"/>
+                  </a:lnTo>
+                  <a:lnTo>
+                    <a:pt x="6954429" y="1381852"/>
+                  </a:lnTo>
+                  <a:lnTo>
+                    <a:pt x="6877961" y="1378507"/>
+                  </a:lnTo>
+                  <a:lnTo>
+                    <a:pt x="6801492" y="1374975"/>
+                  </a:lnTo>
+                  <a:lnTo>
+                    <a:pt x="6725024" y="1371247"/>
+                  </a:lnTo>
+                  <a:lnTo>
+                    <a:pt x="6648556" y="1367312"/>
+                  </a:lnTo>
+                  <a:lnTo>
+                    <a:pt x="6572087" y="1363159"/>
+                  </a:lnTo>
+                  <a:lnTo>
+                    <a:pt x="6495619" y="1358774"/>
+                  </a:lnTo>
+                  <a:lnTo>
+                    <a:pt x="6419150" y="1354145"/>
+                  </a:lnTo>
+                  <a:lnTo>
+                    <a:pt x="6342682" y="1349259"/>
+                  </a:lnTo>
+                  <a:lnTo>
+                    <a:pt x="6266213" y="1344101"/>
+                  </a:lnTo>
+                  <a:lnTo>
+                    <a:pt x="6189745" y="1338657"/>
+                  </a:lnTo>
+                  <a:lnTo>
+                    <a:pt x="6113277" y="1332910"/>
+                  </a:lnTo>
+                  <a:lnTo>
+                    <a:pt x="6036808" y="1326843"/>
+                  </a:lnTo>
+                  <a:lnTo>
+                    <a:pt x="5960340" y="1320439"/>
+                  </a:lnTo>
+                  <a:lnTo>
+                    <a:pt x="5883871" y="1313679"/>
+                  </a:lnTo>
+                  <a:lnTo>
+                    <a:pt x="5807403" y="1306543"/>
+                  </a:lnTo>
+                  <a:lnTo>
+                    <a:pt x="5730934" y="1299011"/>
+                  </a:lnTo>
+                  <a:lnTo>
+                    <a:pt x="5654466" y="1291059"/>
+                  </a:lnTo>
+                  <a:lnTo>
+                    <a:pt x="5577998" y="1282666"/>
+                  </a:lnTo>
+                  <a:lnTo>
+                    <a:pt x="5501529" y="1273805"/>
+                  </a:lnTo>
+                  <a:lnTo>
+                    <a:pt x="5425061" y="1264453"/>
+                  </a:lnTo>
+                  <a:lnTo>
+                    <a:pt x="5348592" y="1254580"/>
+                  </a:lnTo>
+                  <a:lnTo>
+                    <a:pt x="5272124" y="1244158"/>
+                  </a:lnTo>
+                  <a:lnTo>
+                    <a:pt x="5195655" y="1233157"/>
+                  </a:lnTo>
+                  <a:lnTo>
+                    <a:pt x="5119187" y="1221544"/>
+                  </a:lnTo>
+                  <a:lnTo>
+                    <a:pt x="5042719" y="1209285"/>
+                  </a:lnTo>
+                  <a:lnTo>
+                    <a:pt x="4966250" y="1196345"/>
+                  </a:lnTo>
+                  <a:lnTo>
+                    <a:pt x="4889782" y="1182685"/>
+                  </a:lnTo>
+                  <a:lnTo>
+                    <a:pt x="4813313" y="1168266"/>
+                  </a:lnTo>
+                  <a:lnTo>
+                    <a:pt x="4736845" y="1153045"/>
+                  </a:lnTo>
+                  <a:lnTo>
+                    <a:pt x="4660376" y="1136978"/>
+                  </a:lnTo>
+                  <a:lnTo>
+                    <a:pt x="4583908" y="1120018"/>
+                  </a:lnTo>
+                  <a:lnTo>
+                    <a:pt x="4507439" y="1102114"/>
+                  </a:lnTo>
+                  <a:lnTo>
+                    <a:pt x="4430971" y="1083215"/>
+                  </a:lnTo>
+                  <a:lnTo>
+                    <a:pt x="4354503" y="1063265"/>
+                  </a:lnTo>
+                  <a:lnTo>
+                    <a:pt x="4278034" y="1042206"/>
+                  </a:lnTo>
+                  <a:lnTo>
+                    <a:pt x="4201566" y="1019977"/>
+                  </a:lnTo>
+                  <a:lnTo>
+                    <a:pt x="4125097" y="996511"/>
+                  </a:lnTo>
+                  <a:lnTo>
+                    <a:pt x="4048629" y="971740"/>
+                  </a:lnTo>
+                  <a:lnTo>
+                    <a:pt x="3972160" y="945593"/>
+                  </a:lnTo>
+                  <a:lnTo>
+                    <a:pt x="3895692" y="917991"/>
+                  </a:lnTo>
+                  <a:lnTo>
+                    <a:pt x="3819224" y="888855"/>
+                  </a:lnTo>
+                  <a:lnTo>
+                    <a:pt x="3742755" y="858099"/>
+                  </a:lnTo>
+                  <a:lnTo>
+                    <a:pt x="3666287" y="825633"/>
+                  </a:lnTo>
+                  <a:lnTo>
+                    <a:pt x="3589818" y="791361"/>
+                  </a:lnTo>
+                  <a:lnTo>
+                    <a:pt x="3513350" y="755185"/>
+                  </a:lnTo>
+                  <a:lnTo>
+                    <a:pt x="3436881" y="716996"/>
+                  </a:lnTo>
+                  <a:lnTo>
+                    <a:pt x="3360413" y="676685"/>
+                  </a:lnTo>
+                  <a:lnTo>
+                    <a:pt x="3283945" y="655548"/>
+                  </a:lnTo>
+                  <a:lnTo>
+                    <a:pt x="3207476" y="644367"/>
+                  </a:lnTo>
+                  <a:lnTo>
+                    <a:pt x="3131008" y="633027"/>
+                  </a:lnTo>
+                  <a:lnTo>
+                    <a:pt x="3054539" y="621526"/>
+                  </a:lnTo>
+                  <a:lnTo>
+                    <a:pt x="2978071" y="609861"/>
+                  </a:lnTo>
+                  <a:lnTo>
+                    <a:pt x="2901602" y="598031"/>
+                  </a:lnTo>
+                  <a:lnTo>
+                    <a:pt x="2825134" y="586032"/>
+                  </a:lnTo>
+                  <a:lnTo>
+                    <a:pt x="2748666" y="573863"/>
+                  </a:lnTo>
+                  <a:lnTo>
+                    <a:pt x="2672197" y="561520"/>
+                  </a:lnTo>
+                  <a:lnTo>
+                    <a:pt x="2595729" y="549002"/>
+                  </a:lnTo>
+                  <a:lnTo>
+                    <a:pt x="2519260" y="536307"/>
+                  </a:lnTo>
+                  <a:lnTo>
+                    <a:pt x="2442792" y="523430"/>
+                  </a:lnTo>
+                  <a:lnTo>
+                    <a:pt x="2366323" y="510371"/>
+                  </a:lnTo>
+                  <a:lnTo>
+                    <a:pt x="2289855" y="497126"/>
+                  </a:lnTo>
+                  <a:lnTo>
+                    <a:pt x="2213386" y="483693"/>
+                  </a:lnTo>
+                  <a:lnTo>
+                    <a:pt x="2136918" y="470069"/>
+                  </a:lnTo>
+                  <a:lnTo>
+                    <a:pt x="2060450" y="456251"/>
+                  </a:lnTo>
+                  <a:lnTo>
+                    <a:pt x="1983981" y="442236"/>
+                  </a:lnTo>
+                  <a:lnTo>
+                    <a:pt x="1907513" y="428023"/>
+                  </a:lnTo>
+                  <a:lnTo>
+                    <a:pt x="1831044" y="413607"/>
+                  </a:lnTo>
+                  <a:lnTo>
+                    <a:pt x="1754576" y="398986"/>
+                  </a:lnTo>
+                  <a:lnTo>
+                    <a:pt x="1678107" y="384158"/>
+                  </a:lnTo>
+                  <a:lnTo>
+                    <a:pt x="1601639" y="369118"/>
+                  </a:lnTo>
+                  <a:lnTo>
+                    <a:pt x="1525171" y="353865"/>
+                  </a:lnTo>
+                  <a:lnTo>
+                    <a:pt x="1448702" y="338395"/>
+                  </a:lnTo>
+                  <a:lnTo>
+                    <a:pt x="1372234" y="322705"/>
+                  </a:lnTo>
+                  <a:lnTo>
+                    <a:pt x="1295765" y="306792"/>
+                  </a:lnTo>
+                  <a:lnTo>
+                    <a:pt x="1219297" y="290653"/>
+                  </a:lnTo>
+                  <a:lnTo>
+                    <a:pt x="1142828" y="274285"/>
+                  </a:lnTo>
+                  <a:lnTo>
+                    <a:pt x="1066360" y="257683"/>
+                  </a:lnTo>
+                  <a:lnTo>
+                    <a:pt x="989892" y="240846"/>
+                  </a:lnTo>
+                  <a:lnTo>
+                    <a:pt x="913423" y="223769"/>
+                  </a:lnTo>
+                  <a:lnTo>
+                    <a:pt x="836955" y="206450"/>
+                  </a:lnTo>
+                  <a:lnTo>
+                    <a:pt x="760486" y="188884"/>
+                  </a:lnTo>
+                  <a:lnTo>
+                    <a:pt x="684018" y="171069"/>
+                  </a:lnTo>
+                  <a:lnTo>
+                    <a:pt x="607549" y="153000"/>
+                  </a:lnTo>
+                  <a:lnTo>
+                    <a:pt x="531081" y="134674"/>
+                  </a:lnTo>
+                  <a:lnTo>
+                    <a:pt x="454613" y="116088"/>
+                  </a:lnTo>
+                  <a:lnTo>
+                    <a:pt x="378144" y="97238"/>
+                  </a:lnTo>
+                  <a:lnTo>
+                    <a:pt x="301676" y="78119"/>
+                  </a:lnTo>
+                  <a:lnTo>
+                    <a:pt x="225207" y="58729"/>
+                  </a:lnTo>
+                  <a:lnTo>
+                    <a:pt x="148739" y="39063"/>
+                  </a:lnTo>
+                  <a:lnTo>
+                    <a:pt x="72270" y="19118"/>
                   </a:lnTo>
                   <a:lnTo>
                     <a:pt x="0" y="0"/>
@@ -4127,303 +4514,303 @@
         </p:sp>
         <p:sp>
           <p:nvSpPr>
-            <p:cNvPr id="24" name="pl24"/>
+            <p:cNvPr id="33" name="pl33"/>
             <p:cNvSpPr/>
             <p:nvPr/>
           </p:nvSpPr>
           <p:spPr>
             <a:xfrm>
-              <a:off x="1034353" y="2209169"/>
-              <a:ext cx="7141594" cy="3078694"/>
+              <a:off x="1034353" y="2185486"/>
+              <a:ext cx="7141594" cy="3136765"/>
             </a:xfrm>
             <a:custGeom>
               <a:avLst/>
               <a:pathLst>
-                <a:path w="7141594" h="3078694">
+                <a:path w="7141594" h="3136765">
                   <a:moveTo>
                     <a:pt x="0" y="0"/>
                   </a:moveTo>
                   <a:lnTo>
-                    <a:pt x="30030" y="43177"/>
-                  </a:lnTo>
-                  <a:lnTo>
-                    <a:pt x="106499" y="149433"/>
-                  </a:lnTo>
-                  <a:lnTo>
-                    <a:pt x="182967" y="252125"/>
-                  </a:lnTo>
-                  <a:lnTo>
-                    <a:pt x="259435" y="351374"/>
-                  </a:lnTo>
-                  <a:lnTo>
-                    <a:pt x="335904" y="447294"/>
-                  </a:lnTo>
-                  <a:lnTo>
-                    <a:pt x="412372" y="539997"/>
-                  </a:lnTo>
-                  <a:lnTo>
-                    <a:pt x="488841" y="629591"/>
-                  </a:lnTo>
-                  <a:lnTo>
-                    <a:pt x="565309" y="716180"/>
-                  </a:lnTo>
-                  <a:lnTo>
-                    <a:pt x="641778" y="799865"/>
-                  </a:lnTo>
-                  <a:lnTo>
-                    <a:pt x="718246" y="880744"/>
-                  </a:lnTo>
-                  <a:lnTo>
-                    <a:pt x="794715" y="958910"/>
-                  </a:lnTo>
-                  <a:lnTo>
-                    <a:pt x="871183" y="1034455"/>
-                  </a:lnTo>
-                  <a:lnTo>
-                    <a:pt x="947651" y="1107466"/>
-                  </a:lnTo>
-                  <a:lnTo>
-                    <a:pt x="1024120" y="1178028"/>
-                  </a:lnTo>
-                  <a:lnTo>
-                    <a:pt x="1100588" y="1246224"/>
-                  </a:lnTo>
-                  <a:lnTo>
-                    <a:pt x="1177057" y="1312133"/>
-                  </a:lnTo>
-                  <a:lnTo>
-                    <a:pt x="1253525" y="1375831"/>
-                  </a:lnTo>
-                  <a:lnTo>
-                    <a:pt x="1329994" y="1437393"/>
-                  </a:lnTo>
-                  <a:lnTo>
-                    <a:pt x="1406462" y="1496891"/>
-                  </a:lnTo>
-                  <a:lnTo>
-                    <a:pt x="1482930" y="1554393"/>
-                  </a:lnTo>
-                  <a:lnTo>
-                    <a:pt x="1559399" y="1609966"/>
-                  </a:lnTo>
-                  <a:lnTo>
-                    <a:pt x="1635867" y="1663676"/>
-                  </a:lnTo>
-                  <a:lnTo>
-                    <a:pt x="1712336" y="1715584"/>
-                  </a:lnTo>
-                  <a:lnTo>
-                    <a:pt x="1788804" y="1765752"/>
-                  </a:lnTo>
-                  <a:lnTo>
-                    <a:pt x="1865273" y="1814237"/>
-                  </a:lnTo>
-                  <a:lnTo>
-                    <a:pt x="1941741" y="1861096"/>
-                  </a:lnTo>
-                  <a:lnTo>
-                    <a:pt x="2018209" y="1906383"/>
-                  </a:lnTo>
-                  <a:lnTo>
-                    <a:pt x="2094678" y="1950152"/>
-                  </a:lnTo>
-                  <a:lnTo>
-                    <a:pt x="2171146" y="1992452"/>
-                  </a:lnTo>
-                  <a:lnTo>
-                    <a:pt x="2247615" y="2033334"/>
-                  </a:lnTo>
-                  <a:lnTo>
-                    <a:pt x="2324083" y="2072845"/>
-                  </a:lnTo>
-                  <a:lnTo>
-                    <a:pt x="2400552" y="2111031"/>
-                  </a:lnTo>
-                  <a:lnTo>
-                    <a:pt x="2477020" y="2147936"/>
-                  </a:lnTo>
-                  <a:lnTo>
-                    <a:pt x="2553488" y="2183604"/>
-                  </a:lnTo>
-                  <a:lnTo>
-                    <a:pt x="2629957" y="2218075"/>
-                  </a:lnTo>
-                  <a:lnTo>
-                    <a:pt x="2706425" y="2251390"/>
-                  </a:lnTo>
-                  <a:lnTo>
-                    <a:pt x="2782894" y="2283588"/>
-                  </a:lnTo>
-                  <a:lnTo>
-                    <a:pt x="2859362" y="2314706"/>
-                  </a:lnTo>
-                  <a:lnTo>
-                    <a:pt x="2935831" y="2344780"/>
-                  </a:lnTo>
-                  <a:lnTo>
-                    <a:pt x="3012299" y="2373846"/>
-                  </a:lnTo>
-                  <a:lnTo>
-                    <a:pt x="3088768" y="2401937"/>
-                  </a:lnTo>
-                  <a:lnTo>
-                    <a:pt x="3165236" y="2429086"/>
-                  </a:lnTo>
-                  <a:lnTo>
-                    <a:pt x="3241704" y="2455324"/>
-                  </a:lnTo>
-                  <a:lnTo>
-                    <a:pt x="3318173" y="2480683"/>
-                  </a:lnTo>
-                  <a:lnTo>
-                    <a:pt x="3394641" y="2505190"/>
-                  </a:lnTo>
-                  <a:lnTo>
-                    <a:pt x="3471110" y="2528876"/>
-                  </a:lnTo>
-                  <a:lnTo>
-                    <a:pt x="3547578" y="2551768"/>
-                  </a:lnTo>
-                  <a:lnTo>
-                    <a:pt x="3624047" y="2573892"/>
-                  </a:lnTo>
-                  <a:lnTo>
-                    <a:pt x="3700515" y="2595274"/>
-                  </a:lnTo>
-                  <a:lnTo>
-                    <a:pt x="3776983" y="2615938"/>
-                  </a:lnTo>
-                  <a:lnTo>
-                    <a:pt x="3853452" y="2635910"/>
-                  </a:lnTo>
-                  <a:lnTo>
-                    <a:pt x="3929920" y="2655212"/>
-                  </a:lnTo>
-                  <a:lnTo>
-                    <a:pt x="4006389" y="2673867"/>
-                  </a:lnTo>
-                  <a:lnTo>
-                    <a:pt x="4082857" y="2691896"/>
-                  </a:lnTo>
-                  <a:lnTo>
-                    <a:pt x="4159326" y="2709320"/>
-                  </a:lnTo>
-                  <a:lnTo>
-                    <a:pt x="4235794" y="2726160"/>
-                  </a:lnTo>
-                  <a:lnTo>
-                    <a:pt x="4312262" y="2742435"/>
-                  </a:lnTo>
-                  <a:lnTo>
-                    <a:pt x="4388731" y="2758164"/>
-                  </a:lnTo>
-                  <a:lnTo>
-                    <a:pt x="4465199" y="2773366"/>
-                  </a:lnTo>
-                  <a:lnTo>
-                    <a:pt x="4541668" y="2788058"/>
-                  </a:lnTo>
-                  <a:lnTo>
-                    <a:pt x="4618136" y="2802257"/>
-                  </a:lnTo>
-                  <a:lnTo>
-                    <a:pt x="4694605" y="2815980"/>
-                  </a:lnTo>
-                  <a:lnTo>
-                    <a:pt x="4771073" y="2829243"/>
-                  </a:lnTo>
-                  <a:lnTo>
-                    <a:pt x="4847541" y="2842061"/>
-                  </a:lnTo>
-                  <a:lnTo>
-                    <a:pt x="4924010" y="2854449"/>
-                  </a:lnTo>
-                  <a:lnTo>
-                    <a:pt x="5000478" y="2866422"/>
-                  </a:lnTo>
-                  <a:lnTo>
-                    <a:pt x="5076947" y="2877993"/>
-                  </a:lnTo>
-                  <a:lnTo>
-                    <a:pt x="5153415" y="2889176"/>
-                  </a:lnTo>
-                  <a:lnTo>
-                    <a:pt x="5229884" y="2899984"/>
-                  </a:lnTo>
-                  <a:lnTo>
-                    <a:pt x="5306352" y="2910429"/>
-                  </a:lnTo>
-                  <a:lnTo>
-                    <a:pt x="5382821" y="2920524"/>
-                  </a:lnTo>
-                  <a:lnTo>
-                    <a:pt x="5459289" y="2930281"/>
-                  </a:lnTo>
-                  <a:lnTo>
-                    <a:pt x="5535757" y="2939710"/>
-                  </a:lnTo>
-                  <a:lnTo>
-                    <a:pt x="5612226" y="2948824"/>
-                  </a:lnTo>
-                  <a:lnTo>
-                    <a:pt x="5688694" y="2957631"/>
-                  </a:lnTo>
-                  <a:lnTo>
-                    <a:pt x="5765163" y="2966143"/>
-                  </a:lnTo>
-                  <a:lnTo>
-                    <a:pt x="5841631" y="2974370"/>
-                  </a:lnTo>
-                  <a:lnTo>
-                    <a:pt x="5918100" y="2982321"/>
-                  </a:lnTo>
-                  <a:lnTo>
-                    <a:pt x="5994568" y="2990005"/>
-                  </a:lnTo>
-                  <a:lnTo>
-                    <a:pt x="6071036" y="2997431"/>
-                  </a:lnTo>
-                  <a:lnTo>
-                    <a:pt x="6147505" y="3004609"/>
-                  </a:lnTo>
-                  <a:lnTo>
-                    <a:pt x="6223973" y="3011545"/>
-                  </a:lnTo>
-                  <a:lnTo>
-                    <a:pt x="6300442" y="3018249"/>
-                  </a:lnTo>
-                  <a:lnTo>
-                    <a:pt x="6376910" y="3024728"/>
-                  </a:lnTo>
-                  <a:lnTo>
-                    <a:pt x="6453379" y="3030990"/>
-                  </a:lnTo>
-                  <a:lnTo>
-                    <a:pt x="6529847" y="3037042"/>
-                  </a:lnTo>
-                  <a:lnTo>
-                    <a:pt x="6606315" y="3042891"/>
-                  </a:lnTo>
-                  <a:lnTo>
-                    <a:pt x="6682784" y="3048544"/>
-                  </a:lnTo>
-                  <a:lnTo>
-                    <a:pt x="6759252" y="3054007"/>
-                  </a:lnTo>
-                  <a:lnTo>
-                    <a:pt x="6835721" y="3059287"/>
-                  </a:lnTo>
-                  <a:lnTo>
-                    <a:pt x="6912189" y="3064390"/>
-                  </a:lnTo>
-                  <a:lnTo>
-                    <a:pt x="6988658" y="3069321"/>
-                  </a:lnTo>
-                  <a:lnTo>
-                    <a:pt x="7065126" y="3074088"/>
-                  </a:lnTo>
-                  <a:lnTo>
-                    <a:pt x="7141594" y="3078694"/>
+                    <a:pt x="30030" y="43991"/>
+                  </a:lnTo>
+                  <a:lnTo>
+                    <a:pt x="106499" y="152251"/>
+                  </a:lnTo>
+                  <a:lnTo>
+                    <a:pt x="182967" y="256881"/>
+                  </a:lnTo>
+                  <a:lnTo>
+                    <a:pt x="259435" y="358002"/>
+                  </a:lnTo>
+                  <a:lnTo>
+                    <a:pt x="335904" y="455731"/>
+                  </a:lnTo>
+                  <a:lnTo>
+                    <a:pt x="412372" y="550183"/>
+                  </a:lnTo>
+                  <a:lnTo>
+                    <a:pt x="488841" y="641466"/>
+                  </a:lnTo>
+                  <a:lnTo>
+                    <a:pt x="565309" y="729689"/>
+                  </a:lnTo>
+                  <a:lnTo>
+                    <a:pt x="641778" y="814953"/>
+                  </a:lnTo>
+                  <a:lnTo>
+                    <a:pt x="718246" y="897357"/>
+                  </a:lnTo>
+                  <a:lnTo>
+                    <a:pt x="794715" y="976997"/>
+                  </a:lnTo>
+                  <a:lnTo>
+                    <a:pt x="871183" y="1053967"/>
+                  </a:lnTo>
+                  <a:lnTo>
+                    <a:pt x="947651" y="1128355"/>
+                  </a:lnTo>
+                  <a:lnTo>
+                    <a:pt x="1024120" y="1200248"/>
+                  </a:lnTo>
+                  <a:lnTo>
+                    <a:pt x="1100588" y="1269731"/>
+                  </a:lnTo>
+                  <a:lnTo>
+                    <a:pt x="1177057" y="1336883"/>
+                  </a:lnTo>
+                  <a:lnTo>
+                    <a:pt x="1253525" y="1401783"/>
+                  </a:lnTo>
+                  <a:lnTo>
+                    <a:pt x="1329994" y="1464506"/>
+                  </a:lnTo>
+                  <a:lnTo>
+                    <a:pt x="1406462" y="1525125"/>
+                  </a:lnTo>
+                  <a:lnTo>
+                    <a:pt x="1482930" y="1583712"/>
+                  </a:lnTo>
+                  <a:lnTo>
+                    <a:pt x="1559399" y="1640334"/>
+                  </a:lnTo>
+                  <a:lnTo>
+                    <a:pt x="1635867" y="1695057"/>
+                  </a:lnTo>
+                  <a:lnTo>
+                    <a:pt x="1712336" y="1747944"/>
+                  </a:lnTo>
+                  <a:lnTo>
+                    <a:pt x="1788804" y="1799058"/>
+                  </a:lnTo>
+                  <a:lnTo>
+                    <a:pt x="1865273" y="1848457"/>
+                  </a:lnTo>
+                  <a:lnTo>
+                    <a:pt x="1941741" y="1896200"/>
+                  </a:lnTo>
+                  <a:lnTo>
+                    <a:pt x="2018209" y="1942342"/>
+                  </a:lnTo>
+                  <a:lnTo>
+                    <a:pt x="2094678" y="1986936"/>
+                  </a:lnTo>
+                  <a:lnTo>
+                    <a:pt x="2171146" y="2030035"/>
+                  </a:lnTo>
+                  <a:lnTo>
+                    <a:pt x="2247615" y="2071688"/>
+                  </a:lnTo>
+                  <a:lnTo>
+                    <a:pt x="2324083" y="2111944"/>
+                  </a:lnTo>
+                  <a:lnTo>
+                    <a:pt x="2400552" y="2150850"/>
+                  </a:lnTo>
+                  <a:lnTo>
+                    <a:pt x="2477020" y="2188451"/>
+                  </a:lnTo>
+                  <a:lnTo>
+                    <a:pt x="2553488" y="2224791"/>
+                  </a:lnTo>
+                  <a:lnTo>
+                    <a:pt x="2629957" y="2259913"/>
+                  </a:lnTo>
+                  <a:lnTo>
+                    <a:pt x="2706425" y="2293856"/>
+                  </a:lnTo>
+                  <a:lnTo>
+                    <a:pt x="2782894" y="2326661"/>
+                  </a:lnTo>
+                  <a:lnTo>
+                    <a:pt x="2859362" y="2358366"/>
+                  </a:lnTo>
+                  <a:lnTo>
+                    <a:pt x="2935831" y="2389008"/>
+                  </a:lnTo>
+                  <a:lnTo>
+                    <a:pt x="3012299" y="2418622"/>
+                  </a:lnTo>
+                  <a:lnTo>
+                    <a:pt x="3088768" y="2447243"/>
+                  </a:lnTo>
+                  <a:lnTo>
+                    <a:pt x="3165236" y="2474904"/>
+                  </a:lnTo>
+                  <a:lnTo>
+                    <a:pt x="3241704" y="2501637"/>
+                  </a:lnTo>
+                  <a:lnTo>
+                    <a:pt x="3318173" y="2527474"/>
+                  </a:lnTo>
+                  <a:lnTo>
+                    <a:pt x="3394641" y="2552444"/>
+                  </a:lnTo>
+                  <a:lnTo>
+                    <a:pt x="3471110" y="2576577"/>
+                  </a:lnTo>
+                  <a:lnTo>
+                    <a:pt x="3547578" y="2599900"/>
+                  </a:lnTo>
+                  <a:lnTo>
+                    <a:pt x="3624047" y="2622441"/>
+                  </a:lnTo>
+                  <a:lnTo>
+                    <a:pt x="3700515" y="2644226"/>
+                  </a:lnTo>
+                  <a:lnTo>
+                    <a:pt x="3776983" y="2665281"/>
+                  </a:lnTo>
+                  <a:lnTo>
+                    <a:pt x="3853452" y="2685629"/>
+                  </a:lnTo>
+                  <a:lnTo>
+                    <a:pt x="3929920" y="2705295"/>
+                  </a:lnTo>
+                  <a:lnTo>
+                    <a:pt x="4006389" y="2724302"/>
+                  </a:lnTo>
+                  <a:lnTo>
+                    <a:pt x="4082857" y="2742671"/>
+                  </a:lnTo>
+                  <a:lnTo>
+                    <a:pt x="4159326" y="2760424"/>
+                  </a:lnTo>
+                  <a:lnTo>
+                    <a:pt x="4235794" y="2777581"/>
+                  </a:lnTo>
+                  <a:lnTo>
+                    <a:pt x="4312262" y="2794163"/>
+                  </a:lnTo>
+                  <a:lnTo>
+                    <a:pt x="4388731" y="2810189"/>
+                  </a:lnTo>
+                  <a:lnTo>
+                    <a:pt x="4465199" y="2825678"/>
+                  </a:lnTo>
+                  <a:lnTo>
+                    <a:pt x="4541668" y="2840647"/>
+                  </a:lnTo>
+                  <a:lnTo>
+                    <a:pt x="4618136" y="2855114"/>
+                  </a:lnTo>
+                  <a:lnTo>
+                    <a:pt x="4694605" y="2869096"/>
+                  </a:lnTo>
+                  <a:lnTo>
+                    <a:pt x="4771073" y="2882609"/>
+                  </a:lnTo>
+                  <a:lnTo>
+                    <a:pt x="4847541" y="2895669"/>
+                  </a:lnTo>
+                  <a:lnTo>
+                    <a:pt x="4924010" y="2908290"/>
+                  </a:lnTo>
+                  <a:lnTo>
+                    <a:pt x="5000478" y="2920489"/>
+                  </a:lnTo>
+                  <a:lnTo>
+                    <a:pt x="5076947" y="2932278"/>
+                  </a:lnTo>
+                  <a:lnTo>
+                    <a:pt x="5153415" y="2943672"/>
+                  </a:lnTo>
+                  <a:lnTo>
+                    <a:pt x="5229884" y="2954684"/>
+                  </a:lnTo>
+                  <a:lnTo>
+                    <a:pt x="5306352" y="2965326"/>
+                  </a:lnTo>
+                  <a:lnTo>
+                    <a:pt x="5382821" y="2975612"/>
+                  </a:lnTo>
+                  <a:lnTo>
+                    <a:pt x="5459289" y="2985553"/>
+                  </a:lnTo>
+                  <a:lnTo>
+                    <a:pt x="5535757" y="2995160"/>
+                  </a:lnTo>
+                  <a:lnTo>
+                    <a:pt x="5612226" y="3004445"/>
+                  </a:lnTo>
+                  <a:lnTo>
+                    <a:pt x="5688694" y="3013419"/>
+                  </a:lnTo>
+                  <a:lnTo>
+                    <a:pt x="5765163" y="3022091"/>
+                  </a:lnTo>
+                  <a:lnTo>
+                    <a:pt x="5841631" y="3030473"/>
+                  </a:lnTo>
+                  <a:lnTo>
+                    <a:pt x="5918100" y="3038574"/>
+                  </a:lnTo>
+                  <a:lnTo>
+                    <a:pt x="5994568" y="3046403"/>
+                  </a:lnTo>
+                  <a:lnTo>
+                    <a:pt x="6071036" y="3053969"/>
+                  </a:lnTo>
+                  <a:lnTo>
+                    <a:pt x="6147505" y="3061282"/>
+                  </a:lnTo>
+                  <a:lnTo>
+                    <a:pt x="6223973" y="3068350"/>
+                  </a:lnTo>
+                  <a:lnTo>
+                    <a:pt x="6300442" y="3075180"/>
+                  </a:lnTo>
+                  <a:lnTo>
+                    <a:pt x="6376910" y="3081781"/>
+                  </a:lnTo>
+                  <a:lnTo>
+                    <a:pt x="6453379" y="3088161"/>
+                  </a:lnTo>
+                  <a:lnTo>
+                    <a:pt x="6529847" y="3094327"/>
+                  </a:lnTo>
+                  <a:lnTo>
+                    <a:pt x="6606315" y="3100287"/>
+                  </a:lnTo>
+                  <a:lnTo>
+                    <a:pt x="6682784" y="3106046"/>
+                  </a:lnTo>
+                  <a:lnTo>
+                    <a:pt x="6759252" y="3111612"/>
+                  </a:lnTo>
+                  <a:lnTo>
+                    <a:pt x="6835721" y="3116992"/>
+                  </a:lnTo>
+                  <a:lnTo>
+                    <a:pt x="6912189" y="3122191"/>
+                  </a:lnTo>
+                  <a:lnTo>
+                    <a:pt x="6988658" y="3127215"/>
+                  </a:lnTo>
+                  <a:lnTo>
+                    <a:pt x="7065126" y="3132072"/>
+                  </a:lnTo>
+                  <a:lnTo>
+                    <a:pt x="7141594" y="3136765"/>
                   </a:lnTo>
                 </a:path>
               </a:pathLst>
@@ -4446,13 +4833,13 @@
         </p:sp>
         <p:sp>
           <p:nvSpPr>
-            <p:cNvPr id="25" name="pl25"/>
+            <p:cNvPr id="34" name="pl34"/>
             <p:cNvSpPr/>
             <p:nvPr/>
           </p:nvSpPr>
           <p:spPr>
             <a:xfrm>
-              <a:off x="915645" y="4655980"/>
+              <a:off x="915645" y="4678449"/>
               <a:ext cx="7682587" cy="0"/>
             </a:xfrm>
             <a:custGeom>
@@ -4489,21 +4876,21 @@
         </p:sp>
         <p:sp>
           <p:nvSpPr>
-            <p:cNvPr id="26" name="pl26"/>
+            <p:cNvPr id="35" name="pl35"/>
             <p:cNvSpPr/>
             <p:nvPr/>
           </p:nvSpPr>
           <p:spPr>
             <a:xfrm>
-              <a:off x="4250960" y="2209169"/>
-              <a:ext cx="0" cy="3364365"/>
+              <a:off x="4250960" y="2185486"/>
+              <a:ext cx="0" cy="3427824"/>
             </a:xfrm>
             <a:custGeom>
               <a:avLst/>
               <a:pathLst>
-                <a:path w="0" h="3364365">
+                <a:path w="0" h="3427824">
                   <a:moveTo>
-                    <a:pt x="0" y="3364365"/>
+                    <a:pt x="0" y="3427824"/>
                   </a:moveTo>
                   <a:lnTo>
                     <a:pt x="0" y="0"/>
@@ -4532,13 +4919,13 @@
         </p:sp>
         <p:sp>
           <p:nvSpPr>
-            <p:cNvPr id="27" name="tx27"/>
+            <p:cNvPr id="36" name="tx36"/>
             <p:cNvSpPr/>
             <p:nvPr/>
           </p:nvSpPr>
           <p:spPr>
             <a:xfrm>
-              <a:off x="756929" y="5369631"/>
+              <a:off x="756929" y="5406523"/>
               <a:ext cx="79004" cy="101955"/>
             </a:xfrm>
             <a:prstGeom prst="rect">
@@ -4578,13 +4965,13 @@
         </p:sp>
         <p:sp>
           <p:nvSpPr>
-            <p:cNvPr id="28" name="tx28"/>
+            <p:cNvPr id="37" name="tx37"/>
             <p:cNvSpPr/>
             <p:nvPr/>
           </p:nvSpPr>
           <p:spPr>
             <a:xfrm>
-              <a:off x="756929" y="4605002"/>
+              <a:off x="756929" y="4627472"/>
               <a:ext cx="79004" cy="101955"/>
             </a:xfrm>
             <a:prstGeom prst="rect">
@@ -4624,13 +5011,13 @@
         </p:sp>
         <p:sp>
           <p:nvSpPr>
-            <p:cNvPr id="29" name="tx29"/>
+            <p:cNvPr id="38" name="tx38"/>
             <p:cNvSpPr/>
             <p:nvPr/>
           </p:nvSpPr>
           <p:spPr>
             <a:xfrm>
-              <a:off x="756929" y="3840374"/>
+              <a:off x="756929" y="3848420"/>
               <a:ext cx="79004" cy="101955"/>
             </a:xfrm>
             <a:prstGeom prst="rect">
@@ -4670,13 +5057,13 @@
         </p:sp>
         <p:sp>
           <p:nvSpPr>
-            <p:cNvPr id="30" name="tx30"/>
+            <p:cNvPr id="39" name="tx39"/>
             <p:cNvSpPr/>
             <p:nvPr/>
           </p:nvSpPr>
           <p:spPr>
             <a:xfrm>
-              <a:off x="756929" y="3075745"/>
+              <a:off x="756929" y="3069369"/>
               <a:ext cx="79004" cy="101955"/>
             </a:xfrm>
             <a:prstGeom prst="rect">
@@ -4716,13 +5103,13 @@
         </p:sp>
         <p:sp>
           <p:nvSpPr>
-            <p:cNvPr id="31" name="tx31"/>
+            <p:cNvPr id="40" name="tx40"/>
             <p:cNvSpPr/>
             <p:nvPr/>
           </p:nvSpPr>
           <p:spPr>
             <a:xfrm>
-              <a:off x="756929" y="2311117"/>
+              <a:off x="756929" y="2290318"/>
               <a:ext cx="79004" cy="101955"/>
             </a:xfrm>
             <a:prstGeom prst="rect">
@@ -4762,14 +5149,14 @@
         </p:sp>
         <p:sp>
           <p:nvSpPr>
-            <p:cNvPr id="32" name="tx32"/>
+            <p:cNvPr id="41" name="tx41"/>
             <p:cNvSpPr/>
             <p:nvPr/>
           </p:nvSpPr>
           <p:spPr>
             <a:xfrm>
-              <a:off x="2451993" y="5653245"/>
-              <a:ext cx="244784" cy="101955"/>
+              <a:off x="1598722" y="5693022"/>
+              <a:ext cx="205282" cy="101955"/>
             </a:xfrm>
             <a:prstGeom prst="rect">
               <a:avLst/>
@@ -4801,21 +5188,21 @@
                   <a:latin typeface="Helvetica"/>
                   <a:cs typeface="Helvetica"/>
                 </a:rPr>
-                <a:t>-0.2</a:t>
+                <a:t>-30</a:t>
               </a:r>
             </a:p>
           </p:txBody>
         </p:sp>
         <p:sp>
           <p:nvSpPr>
-            <p:cNvPr id="33" name="tx33"/>
+            <p:cNvPr id="42" name="tx42"/>
             <p:cNvSpPr/>
             <p:nvPr/>
           </p:nvSpPr>
           <p:spPr>
             <a:xfrm>
-              <a:off x="4221672" y="5653245"/>
-              <a:ext cx="197510" cy="101955"/>
+              <a:off x="2471744" y="5693022"/>
+              <a:ext cx="205282" cy="101955"/>
             </a:xfrm>
             <a:prstGeom prst="rect">
               <a:avLst/>
@@ -4847,21 +5234,21 @@
                   <a:latin typeface="Helvetica"/>
                   <a:cs typeface="Helvetica"/>
                 </a:rPr>
-                <a:t>0.0</a:t>
+                <a:t>-20</a:t>
               </a:r>
             </a:p>
           </p:txBody>
         </p:sp>
         <p:sp>
           <p:nvSpPr>
-            <p:cNvPr id="34" name="tx34"/>
+            <p:cNvPr id="43" name="tx43"/>
             <p:cNvSpPr/>
             <p:nvPr/>
           </p:nvSpPr>
           <p:spPr>
             <a:xfrm>
-              <a:off x="5967715" y="5653245"/>
-              <a:ext cx="197510" cy="101955"/>
+              <a:off x="3344765" y="5693022"/>
+              <a:ext cx="205282" cy="101955"/>
             </a:xfrm>
             <a:prstGeom prst="rect">
               <a:avLst/>
@@ -4893,21 +5280,21 @@
                   <a:latin typeface="Helvetica"/>
                   <a:cs typeface="Helvetica"/>
                 </a:rPr>
-                <a:t>0.2</a:t>
+                <a:t>-10</a:t>
               </a:r>
             </a:p>
           </p:txBody>
         </p:sp>
         <p:sp>
           <p:nvSpPr>
-            <p:cNvPr id="35" name="tx35"/>
+            <p:cNvPr id="44" name="tx44"/>
             <p:cNvSpPr/>
             <p:nvPr/>
           </p:nvSpPr>
           <p:spPr>
             <a:xfrm>
-              <a:off x="7713757" y="5653245"/>
-              <a:ext cx="197510" cy="101955"/>
+              <a:off x="4280925" y="5693022"/>
+              <a:ext cx="79004" cy="101955"/>
             </a:xfrm>
             <a:prstGeom prst="rect">
               <a:avLst/>
@@ -4939,21 +5326,205 @@
                   <a:latin typeface="Helvetica"/>
                   <a:cs typeface="Helvetica"/>
                 </a:rPr>
-                <a:t>0.4</a:t>
+                <a:t>0</a:t>
               </a:r>
             </a:p>
           </p:txBody>
         </p:sp>
         <p:sp>
           <p:nvSpPr>
-            <p:cNvPr id="36" name="tx36"/>
+            <p:cNvPr id="45" name="tx45"/>
             <p:cNvSpPr/>
             <p:nvPr/>
           </p:nvSpPr>
           <p:spPr>
             <a:xfrm>
-              <a:off x="2688337" y="5834415"/>
-              <a:ext cx="2138873" cy="127558"/>
+              <a:off x="5114445" y="5693022"/>
+              <a:ext cx="158008" cy="101955"/>
+            </a:xfrm>
+            <a:prstGeom prst="rect">
+              <a:avLst/>
+            </a:prstGeom>
+            <a:noFill/>
+          </p:spPr>
+          <p:txBody>
+            <a:bodyPr lIns="0" rIns="0" tIns="0" bIns="0" anchorCtr="1" anchor="ctr" wrap="none"/>
+            <a:lstStyle/>
+            <a:p>
+              <a:pPr algn="l" marL="0" marR="0" indent="0">
+                <a:lnSpc>
+                  <a:spcPts val="1120"/>
+                </a:lnSpc>
+                <a:spcBef>
+                  <a:spcPts val="0"/>
+                </a:spcBef>
+                <a:spcAft>
+                  <a:spcPts val="0"/>
+                </a:spcAft>
+              </a:pPr>
+              <a:r>
+                <a:rPr sz="1120">
+                  <a:solidFill>
+                    <a:srgbClr val="4D4D4D">
+                      <a:alpha val="100000"/>
+                    </a:srgbClr>
+                  </a:solidFill>
+                  <a:latin typeface="Helvetica"/>
+                  <a:cs typeface="Helvetica"/>
+                </a:rPr>
+                <a:t>10</a:t>
+              </a:r>
+            </a:p>
+          </p:txBody>
+        </p:sp>
+        <p:sp>
+          <p:nvSpPr>
+            <p:cNvPr id="46" name="tx46"/>
+            <p:cNvSpPr/>
+            <p:nvPr/>
+          </p:nvSpPr>
+          <p:spPr>
+            <a:xfrm>
+              <a:off x="5987466" y="5693022"/>
+              <a:ext cx="158008" cy="101955"/>
+            </a:xfrm>
+            <a:prstGeom prst="rect">
+              <a:avLst/>
+            </a:prstGeom>
+            <a:noFill/>
+          </p:spPr>
+          <p:txBody>
+            <a:bodyPr lIns="0" rIns="0" tIns="0" bIns="0" anchorCtr="1" anchor="ctr" wrap="none"/>
+            <a:lstStyle/>
+            <a:p>
+              <a:pPr algn="l" marL="0" marR="0" indent="0">
+                <a:lnSpc>
+                  <a:spcPts val="1120"/>
+                </a:lnSpc>
+                <a:spcBef>
+                  <a:spcPts val="0"/>
+                </a:spcBef>
+                <a:spcAft>
+                  <a:spcPts val="0"/>
+                </a:spcAft>
+              </a:pPr>
+              <a:r>
+                <a:rPr sz="1120">
+                  <a:solidFill>
+                    <a:srgbClr val="4D4D4D">
+                      <a:alpha val="100000"/>
+                    </a:srgbClr>
+                  </a:solidFill>
+                  <a:latin typeface="Helvetica"/>
+                  <a:cs typeface="Helvetica"/>
+                </a:rPr>
+                <a:t>20</a:t>
+              </a:r>
+            </a:p>
+          </p:txBody>
+        </p:sp>
+        <p:sp>
+          <p:nvSpPr>
+            <p:cNvPr id="47" name="tx47"/>
+            <p:cNvSpPr/>
+            <p:nvPr/>
+          </p:nvSpPr>
+          <p:spPr>
+            <a:xfrm>
+              <a:off x="6860487" y="5693022"/>
+              <a:ext cx="158008" cy="101955"/>
+            </a:xfrm>
+            <a:prstGeom prst="rect">
+              <a:avLst/>
+            </a:prstGeom>
+            <a:noFill/>
+          </p:spPr>
+          <p:txBody>
+            <a:bodyPr lIns="0" rIns="0" tIns="0" bIns="0" anchorCtr="1" anchor="ctr" wrap="none"/>
+            <a:lstStyle/>
+            <a:p>
+              <a:pPr algn="l" marL="0" marR="0" indent="0">
+                <a:lnSpc>
+                  <a:spcPts val="1120"/>
+                </a:lnSpc>
+                <a:spcBef>
+                  <a:spcPts val="0"/>
+                </a:spcBef>
+                <a:spcAft>
+                  <a:spcPts val="0"/>
+                </a:spcAft>
+              </a:pPr>
+              <a:r>
+                <a:rPr sz="1120">
+                  <a:solidFill>
+                    <a:srgbClr val="4D4D4D">
+                      <a:alpha val="100000"/>
+                    </a:srgbClr>
+                  </a:solidFill>
+                  <a:latin typeface="Helvetica"/>
+                  <a:cs typeface="Helvetica"/>
+                </a:rPr>
+                <a:t>30</a:t>
+              </a:r>
+            </a:p>
+          </p:txBody>
+        </p:sp>
+        <p:sp>
+          <p:nvSpPr>
+            <p:cNvPr id="48" name="tx48"/>
+            <p:cNvSpPr/>
+            <p:nvPr/>
+          </p:nvSpPr>
+          <p:spPr>
+            <a:xfrm>
+              <a:off x="7733508" y="5693022"/>
+              <a:ext cx="158008" cy="101955"/>
+            </a:xfrm>
+            <a:prstGeom prst="rect">
+              <a:avLst/>
+            </a:prstGeom>
+            <a:noFill/>
+          </p:spPr>
+          <p:txBody>
+            <a:bodyPr lIns="0" rIns="0" tIns="0" bIns="0" anchorCtr="1" anchor="ctr" wrap="none"/>
+            <a:lstStyle/>
+            <a:p>
+              <a:pPr algn="l" marL="0" marR="0" indent="0">
+                <a:lnSpc>
+                  <a:spcPts val="1120"/>
+                </a:lnSpc>
+                <a:spcBef>
+                  <a:spcPts val="0"/>
+                </a:spcBef>
+                <a:spcAft>
+                  <a:spcPts val="0"/>
+                </a:spcAft>
+              </a:pPr>
+              <a:r>
+                <a:rPr sz="1120">
+                  <a:solidFill>
+                    <a:srgbClr val="4D4D4D">
+                      <a:alpha val="100000"/>
+                    </a:srgbClr>
+                  </a:solidFill>
+                  <a:latin typeface="Helvetica"/>
+                  <a:cs typeface="Helvetica"/>
+                </a:rPr>
+                <a:t>40</a:t>
+              </a:r>
+            </a:p>
+          </p:txBody>
+        </p:sp>
+        <p:sp>
+          <p:nvSpPr>
+            <p:cNvPr id="49" name="tx49"/>
+            <p:cNvSpPr/>
+            <p:nvPr/>
+          </p:nvSpPr>
+          <p:spPr>
+            <a:xfrm>
+              <a:off x="3941888" y="5870717"/>
+              <a:ext cx="1630100" cy="127558"/>
             </a:xfrm>
             <a:prstGeom prst="rect">
               <a:avLst/>
@@ -4985,572 +5556,20 @@
                   <a:latin typeface="Helvetica"/>
                   <a:cs typeface="Helvetica"/>
                 </a:rPr>
-                <a:t>eGFR difference  =  (eGFR</a:t>
+                <a:t>eGFR difference (%)</a:t>
               </a:r>
             </a:p>
           </p:txBody>
         </p:sp>
         <p:sp>
           <p:nvSpPr>
-            <p:cNvPr id="37" name="tx37"/>
-            <p:cNvSpPr/>
-            <p:nvPr/>
-          </p:nvSpPr>
-          <p:spPr>
-            <a:xfrm>
-              <a:off x="4827210" y="5905308"/>
-              <a:ext cx="89885" cy="89245"/>
-            </a:xfrm>
-            <a:prstGeom prst="rect">
-              <a:avLst/>
-            </a:prstGeom>
-            <a:noFill/>
-          </p:spPr>
-          <p:txBody>
-            <a:bodyPr lIns="0" rIns="0" tIns="0" bIns="0" anchorCtr="1" anchor="ctr" wrap="none"/>
-            <a:lstStyle/>
-            <a:p>
-              <a:pPr algn="l" marL="0" marR="0" indent="0">
-                <a:lnSpc>
-                  <a:spcPts val="979"/>
-                </a:lnSpc>
-                <a:spcBef>
-                  <a:spcPts val="0"/>
-                </a:spcBef>
-                <a:spcAft>
-                  <a:spcPts val="0"/>
-                </a:spcAft>
-              </a:pPr>
-              <a:r>
-                <a:rPr sz="979">
-                  <a:solidFill>
-                    <a:srgbClr val="000000">
-                      <a:alpha val="100000"/>
-                    </a:srgbClr>
-                  </a:solidFill>
-                  <a:latin typeface="Helvetica"/>
-                  <a:cs typeface="Helvetica"/>
-                </a:rPr>
-                <a:t>C</a:t>
-              </a:r>
-            </a:p>
-          </p:txBody>
-        </p:sp>
-        <p:sp>
-          <p:nvSpPr>
-            <p:cNvPr id="38" name="tx38"/>
-            <p:cNvSpPr/>
-            <p:nvPr/>
-          </p:nvSpPr>
-          <p:spPr>
-            <a:xfrm>
-              <a:off x="4917095" y="5905308"/>
-              <a:ext cx="89885" cy="89245"/>
-            </a:xfrm>
-            <a:prstGeom prst="rect">
-              <a:avLst/>
-            </a:prstGeom>
-            <a:noFill/>
-          </p:spPr>
-          <p:txBody>
-            <a:bodyPr lIns="0" rIns="0" tIns="0" bIns="0" anchorCtr="1" anchor="ctr" wrap="none"/>
-            <a:lstStyle/>
-            <a:p>
-              <a:pPr algn="l" marL="0" marR="0" indent="0">
-                <a:lnSpc>
-                  <a:spcPts val="979"/>
-                </a:lnSpc>
-                <a:spcBef>
-                  <a:spcPts val="0"/>
-                </a:spcBef>
-                <a:spcAft>
-                  <a:spcPts val="0"/>
-                </a:spcAft>
-              </a:pPr>
-              <a:r>
-                <a:rPr sz="979">
-                  <a:solidFill>
-                    <a:srgbClr val="000000">
-                      <a:alpha val="100000"/>
-                    </a:srgbClr>
-                  </a:solidFill>
-                  <a:latin typeface="Helvetica"/>
-                  <a:cs typeface="Helvetica"/>
-                </a:rPr>
-                <a:t>R</a:t>
-              </a:r>
-            </a:p>
-          </p:txBody>
-        </p:sp>
-        <p:sp>
-          <p:nvSpPr>
-            <p:cNvPr id="39" name="tx39"/>
-            <p:cNvSpPr/>
-            <p:nvPr/>
-          </p:nvSpPr>
-          <p:spPr>
-            <a:xfrm>
-              <a:off x="5006981" y="5884826"/>
-              <a:ext cx="68305" cy="109728"/>
-            </a:xfrm>
-            <a:prstGeom prst="rect">
-              <a:avLst/>
-            </a:prstGeom>
-            <a:noFill/>
-          </p:spPr>
-          <p:txBody>
-            <a:bodyPr lIns="0" rIns="0" tIns="0" bIns="0" anchorCtr="1" anchor="ctr" wrap="none"/>
-            <a:lstStyle/>
-            <a:p>
-              <a:pPr algn="l" marL="0" marR="0" indent="0">
-                <a:lnSpc>
-                  <a:spcPts val="979"/>
-                </a:lnSpc>
-                <a:spcBef>
-                  <a:spcPts val="0"/>
-                </a:spcBef>
-                <a:spcAft>
-                  <a:spcPts val="0"/>
-                </a:spcAft>
-              </a:pPr>
-              <a:r>
-                <a:rPr sz="979">
-                  <a:solidFill>
-                    <a:srgbClr val="000000">
-                      <a:alpha val="100000"/>
-                    </a:srgbClr>
-                  </a:solidFill>
-                  <a:latin typeface="Symbol"/>
-                  <a:cs typeface="Symbol"/>
-                </a:rPr>
-                <a:t>−</a:t>
-              </a:r>
-            </a:p>
-          </p:txBody>
-        </p:sp>
-        <p:sp>
-          <p:nvSpPr>
-            <p:cNvPr id="40" name="tx40"/>
-            <p:cNvSpPr/>
-            <p:nvPr/>
-          </p:nvSpPr>
-          <p:spPr>
-            <a:xfrm>
-              <a:off x="5075286" y="5905308"/>
-              <a:ext cx="89885" cy="89245"/>
-            </a:xfrm>
-            <a:prstGeom prst="rect">
-              <a:avLst/>
-            </a:prstGeom>
-            <a:noFill/>
-          </p:spPr>
-          <p:txBody>
-            <a:bodyPr lIns="0" rIns="0" tIns="0" bIns="0" anchorCtr="1" anchor="ctr" wrap="none"/>
-            <a:lstStyle/>
-            <a:p>
-              <a:pPr algn="l" marL="0" marR="0" indent="0">
-                <a:lnSpc>
-                  <a:spcPts val="979"/>
-                </a:lnSpc>
-                <a:spcBef>
-                  <a:spcPts val="0"/>
-                </a:spcBef>
-                <a:spcAft>
-                  <a:spcPts val="0"/>
-                </a:spcAft>
-              </a:pPr>
-              <a:r>
-                <a:rPr sz="979">
-                  <a:solidFill>
-                    <a:srgbClr val="000000">
-                      <a:alpha val="100000"/>
-                    </a:srgbClr>
-                  </a:solidFill>
-                  <a:latin typeface="Helvetica"/>
-                  <a:cs typeface="Helvetica"/>
-                </a:rPr>
-                <a:t>C</a:t>
-              </a:r>
-            </a:p>
-          </p:txBody>
-        </p:sp>
-        <p:sp>
-          <p:nvSpPr>
-            <p:cNvPr id="41" name="tx41"/>
-            <p:cNvSpPr/>
-            <p:nvPr/>
-          </p:nvSpPr>
-          <p:spPr>
-            <a:xfrm>
-              <a:off x="5165172" y="5905308"/>
-              <a:ext cx="83027" cy="89245"/>
-            </a:xfrm>
-            <a:prstGeom prst="rect">
-              <a:avLst/>
-            </a:prstGeom>
-            <a:noFill/>
-          </p:spPr>
-          <p:txBody>
-            <a:bodyPr lIns="0" rIns="0" tIns="0" bIns="0" anchorCtr="1" anchor="ctr" wrap="none"/>
-            <a:lstStyle/>
-            <a:p>
-              <a:pPr algn="l" marL="0" marR="0" indent="0">
-                <a:lnSpc>
-                  <a:spcPts val="979"/>
-                </a:lnSpc>
-                <a:spcBef>
-                  <a:spcPts val="0"/>
-                </a:spcBef>
-                <a:spcAft>
-                  <a:spcPts val="0"/>
-                </a:spcAft>
-              </a:pPr>
-              <a:r>
-                <a:rPr sz="979">
-                  <a:solidFill>
-                    <a:srgbClr val="000000">
-                      <a:alpha val="100000"/>
-                    </a:srgbClr>
-                  </a:solidFill>
-                  <a:latin typeface="Helvetica"/>
-                  <a:cs typeface="Helvetica"/>
-                </a:rPr>
-                <a:t>Y</a:t>
-              </a:r>
-            </a:p>
-          </p:txBody>
-        </p:sp>
-        <p:sp>
-          <p:nvSpPr>
-            <p:cNvPr id="42" name="tx42"/>
-            <p:cNvSpPr/>
-            <p:nvPr/>
-          </p:nvSpPr>
-          <p:spPr>
-            <a:xfrm>
-              <a:off x="5248199" y="5905308"/>
-              <a:ext cx="83027" cy="89245"/>
-            </a:xfrm>
-            <a:prstGeom prst="rect">
-              <a:avLst/>
-            </a:prstGeom>
-            <a:noFill/>
-          </p:spPr>
-          <p:txBody>
-            <a:bodyPr lIns="0" rIns="0" tIns="0" bIns="0" anchorCtr="1" anchor="ctr" wrap="none"/>
-            <a:lstStyle/>
-            <a:p>
-              <a:pPr algn="l" marL="0" marR="0" indent="0">
-                <a:lnSpc>
-                  <a:spcPts val="979"/>
-                </a:lnSpc>
-                <a:spcBef>
-                  <a:spcPts val="0"/>
-                </a:spcBef>
-                <a:spcAft>
-                  <a:spcPts val="0"/>
-                </a:spcAft>
-              </a:pPr>
-              <a:r>
-                <a:rPr sz="979">
-                  <a:solidFill>
-                    <a:srgbClr val="000000">
-                      <a:alpha val="100000"/>
-                    </a:srgbClr>
-                  </a:solidFill>
-                  <a:latin typeface="Helvetica"/>
-                  <a:cs typeface="Helvetica"/>
-                </a:rPr>
-                <a:t>S</a:t>
-              </a:r>
-            </a:p>
-          </p:txBody>
-        </p:sp>
-        <p:sp>
-          <p:nvSpPr>
-            <p:cNvPr id="43" name="tx43"/>
-            <p:cNvSpPr/>
-            <p:nvPr/>
-          </p:nvSpPr>
-          <p:spPr>
-            <a:xfrm>
-              <a:off x="5331227" y="5834415"/>
-              <a:ext cx="558149" cy="127558"/>
-            </a:xfrm>
-            <a:prstGeom prst="rect">
-              <a:avLst/>
-            </a:prstGeom>
-            <a:noFill/>
-          </p:spPr>
-          <p:txBody>
-            <a:bodyPr lIns="0" rIns="0" tIns="0" bIns="0" anchorCtr="1" anchor="ctr" wrap="none"/>
-            <a:lstStyle/>
-            <a:p>
-              <a:pPr algn="l" marL="0" marR="0" indent="0">
-                <a:lnSpc>
-                  <a:spcPts val="1400"/>
-                </a:lnSpc>
-                <a:spcBef>
-                  <a:spcPts val="0"/>
-                </a:spcBef>
-                <a:spcAft>
-                  <a:spcPts val="0"/>
-                </a:spcAft>
-              </a:pPr>
-              <a:r>
-                <a:rPr sz="1400">
-                  <a:solidFill>
-                    <a:srgbClr val="000000">
-                      <a:alpha val="100000"/>
-                    </a:srgbClr>
-                  </a:solidFill>
-                  <a:latin typeface="Helvetica"/>
-                  <a:cs typeface="Helvetica"/>
-                </a:rPr>
-                <a:t> − CrCl</a:t>
-              </a:r>
-            </a:p>
-          </p:txBody>
-        </p:sp>
-        <p:sp>
-          <p:nvSpPr>
-            <p:cNvPr id="44" name="tx44"/>
-            <p:cNvSpPr/>
-            <p:nvPr/>
-          </p:nvSpPr>
-          <p:spPr>
-            <a:xfrm>
-              <a:off x="5889377" y="5905308"/>
-              <a:ext cx="89885" cy="89245"/>
-            </a:xfrm>
-            <a:prstGeom prst="rect">
-              <a:avLst/>
-            </a:prstGeom>
-            <a:noFill/>
-          </p:spPr>
-          <p:txBody>
-            <a:bodyPr lIns="0" rIns="0" tIns="0" bIns="0" anchorCtr="1" anchor="ctr" wrap="none"/>
-            <a:lstStyle/>
-            <a:p>
-              <a:pPr algn="l" marL="0" marR="0" indent="0">
-                <a:lnSpc>
-                  <a:spcPts val="979"/>
-                </a:lnSpc>
-                <a:spcBef>
-                  <a:spcPts val="0"/>
-                </a:spcBef>
-                <a:spcAft>
-                  <a:spcPts val="0"/>
-                </a:spcAft>
-              </a:pPr>
-              <a:r>
-                <a:rPr sz="979">
-                  <a:solidFill>
-                    <a:srgbClr val="000000">
-                      <a:alpha val="100000"/>
-                    </a:srgbClr>
-                  </a:solidFill>
-                  <a:latin typeface="Helvetica"/>
-                  <a:cs typeface="Helvetica"/>
-                </a:rPr>
-                <a:t>C</a:t>
-              </a:r>
-            </a:p>
-          </p:txBody>
-        </p:sp>
-        <p:sp>
-          <p:nvSpPr>
-            <p:cNvPr id="45" name="tx45"/>
-            <p:cNvSpPr/>
-            <p:nvPr/>
-          </p:nvSpPr>
-          <p:spPr>
-            <a:xfrm>
-              <a:off x="5979262" y="5905308"/>
-              <a:ext cx="96743" cy="89245"/>
-            </a:xfrm>
-            <a:prstGeom prst="rect">
-              <a:avLst/>
-            </a:prstGeom>
-            <a:noFill/>
-          </p:spPr>
-          <p:txBody>
-            <a:bodyPr lIns="0" rIns="0" tIns="0" bIns="0" anchorCtr="1" anchor="ctr" wrap="none"/>
-            <a:lstStyle/>
-            <a:p>
-              <a:pPr algn="l" marL="0" marR="0" indent="0">
-                <a:lnSpc>
-                  <a:spcPts val="979"/>
-                </a:lnSpc>
-                <a:spcBef>
-                  <a:spcPts val="0"/>
-                </a:spcBef>
-                <a:spcAft>
-                  <a:spcPts val="0"/>
-                </a:spcAft>
-              </a:pPr>
-              <a:r>
-                <a:rPr sz="979">
-                  <a:solidFill>
-                    <a:srgbClr val="000000">
-                      <a:alpha val="100000"/>
-                    </a:srgbClr>
-                  </a:solidFill>
-                  <a:latin typeface="Helvetica"/>
-                  <a:cs typeface="Helvetica"/>
-                </a:rPr>
-                <a:t>G</a:t>
-              </a:r>
-            </a:p>
-          </p:txBody>
-        </p:sp>
-        <p:sp>
-          <p:nvSpPr>
-            <p:cNvPr id="46" name="tx46"/>
-            <p:cNvSpPr/>
-            <p:nvPr/>
-          </p:nvSpPr>
-          <p:spPr>
-            <a:xfrm>
-              <a:off x="6076006" y="5834415"/>
-              <a:ext cx="562904" cy="127558"/>
-            </a:xfrm>
-            <a:prstGeom prst="rect">
-              <a:avLst/>
-            </a:prstGeom>
-            <a:noFill/>
-          </p:spPr>
-          <p:txBody>
-            <a:bodyPr lIns="0" rIns="0" tIns="0" bIns="0" anchorCtr="1" anchor="ctr" wrap="none"/>
-            <a:lstStyle/>
-            <a:p>
-              <a:pPr algn="l" marL="0" marR="0" indent="0">
-                <a:lnSpc>
-                  <a:spcPts val="1400"/>
-                </a:lnSpc>
-                <a:spcBef>
-                  <a:spcPts val="0"/>
-                </a:spcBef>
-                <a:spcAft>
-                  <a:spcPts val="0"/>
-                </a:spcAft>
-              </a:pPr>
-              <a:r>
-                <a:rPr sz="1400">
-                  <a:solidFill>
-                    <a:srgbClr val="000000">
-                      <a:alpha val="100000"/>
-                    </a:srgbClr>
-                  </a:solidFill>
-                  <a:latin typeface="Helvetica"/>
-                  <a:cs typeface="Helvetica"/>
-                </a:rPr>
-                <a:t>) / CrCl</a:t>
-              </a:r>
-            </a:p>
-          </p:txBody>
-        </p:sp>
-        <p:sp>
-          <p:nvSpPr>
-            <p:cNvPr id="47" name="tx47"/>
-            <p:cNvSpPr/>
-            <p:nvPr/>
-          </p:nvSpPr>
-          <p:spPr>
-            <a:xfrm>
-              <a:off x="6638910" y="5905308"/>
-              <a:ext cx="89885" cy="89245"/>
-            </a:xfrm>
-            <a:prstGeom prst="rect">
-              <a:avLst/>
-            </a:prstGeom>
-            <a:noFill/>
-          </p:spPr>
-          <p:txBody>
-            <a:bodyPr lIns="0" rIns="0" tIns="0" bIns="0" anchorCtr="1" anchor="ctr" wrap="none"/>
-            <a:lstStyle/>
-            <a:p>
-              <a:pPr algn="l" marL="0" marR="0" indent="0">
-                <a:lnSpc>
-                  <a:spcPts val="979"/>
-                </a:lnSpc>
-                <a:spcBef>
-                  <a:spcPts val="0"/>
-                </a:spcBef>
-                <a:spcAft>
-                  <a:spcPts val="0"/>
-                </a:spcAft>
-              </a:pPr>
-              <a:r>
-                <a:rPr sz="979">
-                  <a:solidFill>
-                    <a:srgbClr val="000000">
-                      <a:alpha val="100000"/>
-                    </a:srgbClr>
-                  </a:solidFill>
-                  <a:latin typeface="Helvetica"/>
-                  <a:cs typeface="Helvetica"/>
-                </a:rPr>
-                <a:t>C</a:t>
-              </a:r>
-            </a:p>
-          </p:txBody>
-        </p:sp>
-        <p:sp>
-          <p:nvSpPr>
-            <p:cNvPr id="48" name="tx48"/>
-            <p:cNvSpPr/>
-            <p:nvPr/>
-          </p:nvSpPr>
-          <p:spPr>
-            <a:xfrm>
-              <a:off x="6728796" y="5905308"/>
-              <a:ext cx="96743" cy="89245"/>
-            </a:xfrm>
-            <a:prstGeom prst="rect">
-              <a:avLst/>
-            </a:prstGeom>
-            <a:noFill/>
-          </p:spPr>
-          <p:txBody>
-            <a:bodyPr lIns="0" rIns="0" tIns="0" bIns="0" anchorCtr="1" anchor="ctr" wrap="none"/>
-            <a:lstStyle/>
-            <a:p>
-              <a:pPr algn="l" marL="0" marR="0" indent="0">
-                <a:lnSpc>
-                  <a:spcPts val="979"/>
-                </a:lnSpc>
-                <a:spcBef>
-                  <a:spcPts val="0"/>
-                </a:spcBef>
-                <a:spcAft>
-                  <a:spcPts val="0"/>
-                </a:spcAft>
-              </a:pPr>
-              <a:r>
-                <a:rPr sz="979">
-                  <a:solidFill>
-                    <a:srgbClr val="000000">
-                      <a:alpha val="100000"/>
-                    </a:srgbClr>
-                  </a:solidFill>
-                  <a:latin typeface="Helvetica"/>
-                  <a:cs typeface="Helvetica"/>
-                </a:rPr>
-                <a:t>G</a:t>
-              </a:r>
-            </a:p>
-          </p:txBody>
-        </p:sp>
-        <p:sp>
-          <p:nvSpPr>
-            <p:cNvPr id="49" name="tx49"/>
+            <p:cNvPr id="50" name="tx50"/>
             <p:cNvSpPr/>
             <p:nvPr/>
           </p:nvSpPr>
           <p:spPr>
             <a:xfrm rot="-5400000">
-              <a:off x="-37527" y="3827572"/>
+              <a:off x="-37527" y="3835619"/>
               <a:ext cx="1294150" cy="127558"/>
             </a:xfrm>
             <a:prstGeom prst="rect">
@@ -5590,14 +5609,14 @@
         </p:sp>
         <p:sp>
           <p:nvSpPr>
-            <p:cNvPr id="50" name="tx50"/>
+            <p:cNvPr id="51" name="tx51"/>
             <p:cNvSpPr/>
             <p:nvPr/>
           </p:nvSpPr>
           <p:spPr>
             <a:xfrm>
               <a:off x="915645" y="1977589"/>
-              <a:ext cx="6018672" cy="109362"/>
+              <a:ext cx="3786804" cy="91165"/>
             </a:xfrm>
             <a:prstGeom prst="rect">
               <a:avLst/>
@@ -5610,7 +5629,7 @@
             <a:p>
               <a:pPr algn="l" marL="0" marR="0" indent="0">
                 <a:lnSpc>
-                  <a:spcPts val="1200"/>
+                  <a:spcPts val="1000"/>
                 </a:lnSpc>
                 <a:spcBef>
                   <a:spcPts val="0"/>
@@ -5620,7 +5639,7 @@
                 </a:spcAft>
               </a:pPr>
               <a:r>
-                <a:rPr sz="1200">
+                <a:rPr sz="1000">
                   <a:solidFill>
                     <a:srgbClr val="404040">
                       <a:alpha val="100000"/>
@@ -5629,14 +5648,14 @@
                   <a:latin typeface="Helvetica"/>
                   <a:cs typeface="Helvetica"/>
                 </a:rPr>
-                <a:t>subHR = 0.68 (95% CI 0.54-0.85), p = &lt;0.001   (per 0.1-unit increase in eGFR difference)</a:t>
+                <a:t>subHR = 1.48 (95% CI 1.17-1.85), p = &lt;0.001   (per 10% decrease)</a:t>
               </a:r>
             </a:p>
           </p:txBody>
         </p:sp>
         <p:sp>
           <p:nvSpPr>
-            <p:cNvPr id="51" name="tx51"/>
+            <p:cNvPr id="52" name="tx52"/>
             <p:cNvSpPr/>
             <p:nvPr/>
           </p:nvSpPr>
